--- a/outputs/red_black_tree_defense.pptx
+++ b/outputs/red_black_tree_defense.pptx
@@ -45,9 +45,7 @@
     <p:sldId id="290" r:id="rId38"/>
     <p:sldId id="291" r:id="rId39"/>
     <p:sldId id="292" r:id="rId40"/>
-    <p:sldId id="293" r:id="rId41"/>
-    <p:sldId id="294" r:id="rId42"/>
-    <p:sldId id="295" r:id="rId43"/>
+    <p:sldId id="295" r:id="rId41"/>
   </p:sldIdLst>
   <p:sldSz cx="12192000" cy="6858000"/>
   <p:notesSz cx="6858000" cy="9144000"/>
@@ -2337,135 +2335,7 @@
 </p:notes>
 </file>
 
-<file path=ppt/notesSlides/notesSlide39.xml><?xml version="1.0" encoding="utf-8"?>
-<p:notes xmlns:a="http://schemas.openxmlformats.org/drawingml/2006/main" xmlns:r="http://schemas.openxmlformats.org/officeDocument/2006/relationships" xmlns:p="http://schemas.openxmlformats.org/presentationml/2006/main">
-  <p:cSld>
-    <p:spTree>
-      <p:nvGrpSpPr>
-        <p:cNvPr id="1" name=""/>
-        <p:cNvGrpSpPr/>
-        <p:nvPr/>
-      </p:nvGrpSpPr>
-      <p:grpSpPr/>
-      <p:sp>
-        <p:nvSpPr>
-          <p:cNvPr id="2" name="Slide Image Placeholder 1"/>
-          <p:cNvSpPr>
-            <a:spLocks noGrp="1"/>
-          </p:cNvSpPr>
-          <p:nvPr>
-            <p:ph type="sldImg"/>
-          </p:nvPr>
-        </p:nvSpPr>
-        <p:spPr/>
-      </p:sp>
-      <p:sp>
-        <p:nvSpPr>
-          <p:cNvPr id="3" name="Notes Placeholder 2"/>
-          <p:cNvSpPr>
-            <a:spLocks noGrp="1"/>
-          </p:cNvSpPr>
-          <p:nvPr>
-            <p:ph type="body" idx="1"/>
-          </p:nvPr>
-        </p:nvSpPr>
-        <p:spPr/>
-        <p:txBody>
-          <a:bodyPr/>
-          <a:lstStyle/>
-          <a:p/>
-        </p:txBody>
-      </p:sp>
-      <p:sp>
-        <p:nvSpPr>
-          <p:cNvPr id="4" name="Slide Number Placeholder 3"/>
-          <p:cNvSpPr>
-            <a:spLocks noGrp="1"/>
-          </p:cNvSpPr>
-          <p:nvPr>
-            <p:ph type="sldNum" idx="5"/>
-          </p:nvPr>
-        </p:nvSpPr>
-        <p:spPr/>
-        <p:txBody>
-          <a:bodyPr/>
-          <a:lstStyle/>
-          <a:p/>
-        </p:txBody>
-      </p:sp>
-    </p:spTree>
-  </p:cSld>
-  <p:clrMapOvr>
-    <a:masterClrMapping/>
-  </p:clrMapOvr>
-</p:notes>
-</file>
-
 <file path=ppt/notesSlides/notesSlide4.xml><?xml version="1.0" encoding="utf-8"?>
-<p:notes xmlns:a="http://schemas.openxmlformats.org/drawingml/2006/main" xmlns:r="http://schemas.openxmlformats.org/officeDocument/2006/relationships" xmlns:p="http://schemas.openxmlformats.org/presentationml/2006/main">
-  <p:cSld>
-    <p:spTree>
-      <p:nvGrpSpPr>
-        <p:cNvPr id="1" name=""/>
-        <p:cNvGrpSpPr/>
-        <p:nvPr/>
-      </p:nvGrpSpPr>
-      <p:grpSpPr/>
-      <p:sp>
-        <p:nvSpPr>
-          <p:cNvPr id="2" name="Slide Image Placeholder 1"/>
-          <p:cNvSpPr>
-            <a:spLocks noGrp="1"/>
-          </p:cNvSpPr>
-          <p:nvPr>
-            <p:ph type="sldImg"/>
-          </p:nvPr>
-        </p:nvSpPr>
-        <p:spPr/>
-      </p:sp>
-      <p:sp>
-        <p:nvSpPr>
-          <p:cNvPr id="3" name="Notes Placeholder 2"/>
-          <p:cNvSpPr>
-            <a:spLocks noGrp="1"/>
-          </p:cNvSpPr>
-          <p:nvPr>
-            <p:ph type="body" idx="1"/>
-          </p:nvPr>
-        </p:nvSpPr>
-        <p:spPr/>
-        <p:txBody>
-          <a:bodyPr/>
-          <a:lstStyle/>
-          <a:p/>
-        </p:txBody>
-      </p:sp>
-      <p:sp>
-        <p:nvSpPr>
-          <p:cNvPr id="4" name="Slide Number Placeholder 3"/>
-          <p:cNvSpPr>
-            <a:spLocks noGrp="1"/>
-          </p:cNvSpPr>
-          <p:nvPr>
-            <p:ph type="sldNum" idx="5"/>
-          </p:nvPr>
-        </p:nvSpPr>
-        <p:spPr/>
-        <p:txBody>
-          <a:bodyPr/>
-          <a:lstStyle/>
-          <a:p/>
-        </p:txBody>
-      </p:sp>
-    </p:spTree>
-  </p:cSld>
-  <p:clrMapOvr>
-    <a:masterClrMapping/>
-  </p:clrMapOvr>
-</p:notes>
-</file>
-
-<file path=ppt/notesSlides/notesSlide40.xml><?xml version="1.0" encoding="utf-8"?>
 <p:notes xmlns:a="http://schemas.openxmlformats.org/drawingml/2006/main" xmlns:r="http://schemas.openxmlformats.org/officeDocument/2006/relationships" xmlns:p="http://schemas.openxmlformats.org/presentationml/2006/main">
   <p:cSld>
     <p:spTree>
@@ -3369,17 +3239,6 @@
                 <a:cs typeface="微软雅黑" panose="020B0503020204020204" charset="-122"/>
               </a:defRPr>
             </a:pPr>
-            <a:r>
-              <a:rPr sz="1650" b="0">
-                <a:solidFill>
-                  <a:srgbClr val="5D626C"/>
-                </a:solidFill>
-                <a:latin typeface="微软雅黑" panose="020B0503020204020204" charset="-122"/>
-                <a:ea typeface="微软雅黑" panose="020B0503020204020204" charset="-122"/>
-                <a:cs typeface="微软雅黑" panose="020B0503020204020204" charset="-122"/>
-              </a:rPr>
-              <a:t>不是背删除分类，而是看清每一段代码究竟改了哪一小块树。EasyX 仅用于结果演示。</a:t>
-            </a:r>
             <a:endParaRPr sz="1650" b="0">
               <a:solidFill>
                 <a:srgbClr val="5D626C"/>
@@ -5560,6 +5419,85 @@
           </a:p>
         </p:txBody>
       </p:sp>
+      <p:sp>
+        <p:nvSpPr>
+          <p:cNvPr id="27" name="文本框 26"/>
+          <p:cNvSpPr txBox="1"/>
+          <p:nvPr/>
+        </p:nvSpPr>
+        <p:spPr>
+          <a:xfrm>
+            <a:off x="767080" y="4364990"/>
+            <a:ext cx="5073015" cy="2461260"/>
+          </a:xfrm>
+          <a:prstGeom prst="rect">
+            <a:avLst/>
+          </a:prstGeom>
+          <a:noFill/>
+        </p:spPr>
+        <p:txBody>
+          <a:bodyPr wrap="square" rtlCol="0">
+            <a:spAutoFit/>
+          </a:bodyPr>
+          <a:p>
+            <a:r>
+              <a:rPr lang="en-US" altLang="zh-CN" sz="1400"/>
+              <a:t>think:</a:t>
+            </a:r>
+            <a:r>
+              <a:rPr lang="zh-CN" altLang="en-US" sz="1400"/>
+              <a:t>当出现红红冲突的时候，只要父亲染黑即可。判断</a:t>
+            </a:r>
+            <a:r>
+              <a:rPr lang="en-US" altLang="zh-CN" sz="1400"/>
+              <a:t>uncle</a:t>
+            </a:r>
+            <a:r>
+              <a:rPr lang="zh-CN" altLang="en-US" sz="1400"/>
+              <a:t>的条件，如果</a:t>
+            </a:r>
+            <a:r>
+              <a:rPr lang="en-US" altLang="zh-CN" sz="1400"/>
+              <a:t>uncle</a:t>
+            </a:r>
+            <a:r>
+              <a:rPr lang="zh-CN" altLang="en-US" sz="1400"/>
+              <a:t>也是红那就一起染黑，但是祖父一定要染红然后向上传导，因为祖父也属于某个分支，这里就能发现往上收敛很容易解决一些问题。</a:t>
+            </a:r>
+            <a:endParaRPr lang="zh-CN" altLang="en-US" sz="1400"/>
+          </a:p>
+          <a:p>
+            <a:r>
+              <a:rPr lang="zh-CN" altLang="en-US" sz="1400"/>
+              <a:t>如果父亲红但是</a:t>
+            </a:r>
+            <a:r>
+              <a:rPr lang="en-US" altLang="zh-CN" sz="1400"/>
+              <a:t>uncle</a:t>
+            </a:r>
+            <a:r>
+              <a:rPr lang="zh-CN" altLang="en-US" sz="1400"/>
+              <a:t>黑，这时必须要进行旋转，因为物理结构上已经彻底歪了，仅仅依靠染色完全不能解决问题，甚至会往下扩散冲突而不是收敛。</a:t>
+            </a:r>
+            <a:endParaRPr lang="zh-CN" altLang="en-US" sz="1400"/>
+          </a:p>
+          <a:p>
+            <a:r>
+              <a:rPr lang="zh-CN" altLang="en-US" sz="1400"/>
+              <a:t>和</a:t>
+            </a:r>
+            <a:r>
+              <a:rPr lang="en-US" altLang="zh-CN" sz="1400"/>
+              <a:t>remove</a:t>
+            </a:r>
+            <a:r>
+              <a:rPr lang="zh-CN" altLang="en-US" sz="1400"/>
+              <a:t>修复的先染色后旋转不同，这里是先旋转然后染色，因为插入节点的值不确定，我们无法得知他会去到哪个位置，插入时结构在剧烈变动，不走到最后一步，写代码时根本无法用固定的变量去指代那个需要变黑的节点。</a:t>
+            </a:r>
+            <a:endParaRPr lang="zh-CN" altLang="en-US" sz="1400"/>
+          </a:p>
+        </p:txBody>
+      </p:sp>
     </p:spTree>
   </p:cSld>
   <p:clrMapOvr>
@@ -36366,25 +36304,23 @@
           <a:lstStyle/>
           <a:p>
             <a:pPr algn="l">
-              <a:defRPr sz="2700" b="1">
-                <a:solidFill>
-                  <a:srgbClr val="17181C"/>
-                </a:solidFill>
-                <a:latin typeface="微软雅黑" panose="020B0503020204020204" charset="-122"/>
-                <a:ea typeface="微软雅黑" panose="020B0503020204020204" charset="-122"/>
-                <a:cs typeface="微软雅黑" panose="020B0503020204020204" charset="-122"/>
-              </a:defRPr>
-            </a:pPr>
-            <a:r>
-              <a:rPr sz="2700" b="1">
-                <a:solidFill>
-                  <a:srgbClr val="17181C"/>
-                </a:solidFill>
-                <a:latin typeface="微软雅黑" panose="020B0503020204020204" charset="-122"/>
-                <a:ea typeface="微软雅黑" panose="020B0503020204020204" charset="-122"/>
-                <a:cs typeface="微软雅黑" panose="020B0503020204020204" charset="-122"/>
-              </a:rPr>
-              <a:t>EasyX 只负责把后端结果显示出来，本次答辩不展开前端实现</a:t>
+              <a:defRPr sz="1050" b="1">
+                <a:solidFill>
+                  <a:srgbClr val="5D626C"/>
+                </a:solidFill>
+                <a:latin typeface="微软雅黑" panose="020B0503020204020204" charset="-122"/>
+                <a:ea typeface="微软雅黑" panose="020B0503020204020204" charset="-122"/>
+                <a:cs typeface="微软雅黑" panose="020B0503020204020204" charset="-122"/>
+              </a:defRPr>
+            </a:pPr>
+            <a:r>
+              <a:rPr sz="2700">
+                <a:solidFill>
+                  <a:srgbClr val="5D626C"/>
+                </a:solidFill>
+                <a:sym typeface="+mn-ea"/>
+              </a:rPr>
+              <a:t>运行演示</a:t>
             </a:r>
             <a:endParaRPr sz="2700" b="1">
               <a:solidFill>
@@ -36482,137 +36418,115 @@
       </p:sp>
       <p:sp>
         <p:nvSpPr>
-          <p:cNvPr id="6" name="question_34_42"/>
-          <p:cNvSpPr>
-            <a:spLocks noGrp="1"/>
-          </p:cNvSpPr>
-          <p:nvPr/>
-        </p:nvSpPr>
-        <p:spPr>
-          <a:xfrm>
-            <a:off x="400050" y="1695450"/>
-            <a:ext cx="6191250" cy="533400"/>
-          </a:xfrm>
-          <a:prstGeom prst="rect">
-            <a:avLst/>
-          </a:prstGeom>
-          <a:noFill/>
-          <a:ln w="0">
-            <a:noFill/>
-            <a:prstDash val="solid"/>
-          </a:ln>
-        </p:spPr>
-        <p:txBody>
-          <a:bodyPr lIns="0" tIns="0" rIns="0" bIns="0" anchor="t"/>
-          <a:lstStyle/>
-          <a:p>
-            <a:pPr algn="l">
-              <a:defRPr sz="1800" b="1">
-                <a:solidFill>
-                  <a:srgbClr val="DE3840"/>
-                </a:solidFill>
-                <a:latin typeface="微软雅黑" panose="020B0503020204020204" charset="-122"/>
-                <a:ea typeface="微软雅黑" panose="020B0503020204020204" charset="-122"/>
-                <a:cs typeface="微软雅黑" panose="020B0503020204020204" charset="-122"/>
-              </a:defRPr>
-            </a:pPr>
-            <a:r>
-              <a:rPr sz="1800" b="1">
-                <a:solidFill>
-                  <a:srgbClr val="DE3840"/>
-                </a:solidFill>
-                <a:latin typeface="微软雅黑" panose="020B0503020204020204" charset="-122"/>
-                <a:ea typeface="微软雅黑" panose="020B0503020204020204" charset="-122"/>
-                <a:cs typeface="微软雅黑" panose="020B0503020204020204" charset="-122"/>
-              </a:rPr>
-              <a:t>我在演示中会讲什么？</a:t>
-            </a:r>
-            <a:endParaRPr sz="1800" b="1">
-              <a:solidFill>
-                <a:srgbClr val="DE3840"/>
+          <p:cNvPr id="7" name="reason_bar_34_42"/>
+          <p:cNvSpPr>
+            <a:spLocks noGrp="1"/>
+          </p:cNvSpPr>
+          <p:nvPr/>
+        </p:nvSpPr>
+        <p:spPr>
+          <a:xfrm>
+            <a:off x="400050" y="2305050"/>
+            <a:ext cx="66675" cy="3390900"/>
+          </a:xfrm>
+          <a:prstGeom prst="rect">
+            <a:avLst/>
+          </a:prstGeom>
+          <a:solidFill>
+            <a:srgbClr val="DE3840"/>
+          </a:solidFill>
+          <a:ln w="0">
+            <a:noFill/>
+            <a:prstDash val="solid"/>
+          </a:ln>
+        </p:spPr>
+      </p:sp>
+      <p:sp>
+        <p:nvSpPr>
+          <p:cNvPr id="9" name="easyx_scope"/>
+          <p:cNvSpPr>
+            <a:spLocks noGrp="1"/>
+          </p:cNvSpPr>
+          <p:nvPr/>
+        </p:nvSpPr>
+        <p:spPr>
+          <a:xfrm>
+            <a:off x="7810500" y="2143125"/>
+            <a:ext cx="2571750" cy="2095500"/>
+          </a:xfrm>
+          <a:prstGeom prst="rect">
+            <a:avLst/>
+          </a:prstGeom>
+          <a:solidFill>
+            <a:srgbClr val="F2F3F5"/>
+          </a:solidFill>
+          <a:ln w="0">
+            <a:noFill/>
+            <a:prstDash val="solid"/>
+          </a:ln>
+        </p:spPr>
+        <p:txBody>
+          <a:bodyPr lIns="0" tIns="0" rIns="0" bIns="0" anchor="t"/>
+          <a:lstStyle/>
+          <a:p>
+            <a:pPr algn="ctr">
+              <a:defRPr sz="1875" b="1">
+                <a:solidFill>
+                  <a:srgbClr val="17181C"/>
+                </a:solidFill>
+                <a:latin typeface="微软雅黑" panose="020B0503020204020204" charset="-122"/>
+                <a:ea typeface="微软雅黑" panose="020B0503020204020204" charset="-122"/>
+                <a:cs typeface="微软雅黑" panose="020B0503020204020204" charset="-122"/>
+              </a:defRPr>
+            </a:pPr>
+            <a:r>
+              <a:rPr sz="1875" b="1">
+                <a:solidFill>
+                  <a:srgbClr val="17181C"/>
+                </a:solidFill>
+                <a:latin typeface="微软雅黑" panose="020B0503020204020204" charset="-122"/>
+                <a:ea typeface="微软雅黑" panose="020B0503020204020204" charset="-122"/>
+                <a:cs typeface="微软雅黑" panose="020B0503020204020204" charset="-122"/>
+              </a:rPr>
+              <a:t>演示操作</a:t>
+            </a:r>
+            <a:endParaRPr sz="1875" b="1">
+              <a:solidFill>
+                <a:srgbClr val="17181C"/>
               </a:solidFill>
               <a:latin typeface="微软雅黑" panose="020B0503020204020204" charset="-122"/>
               <a:ea typeface="微软雅黑" panose="020B0503020204020204" charset="-122"/>
               <a:cs typeface="微软雅黑" panose="020B0503020204020204" charset="-122"/>
             </a:endParaRPr>
           </a:p>
-        </p:txBody>
-      </p:sp>
-      <p:sp>
-        <p:nvSpPr>
-          <p:cNvPr id="7" name="reason_bar_34_42"/>
-          <p:cNvSpPr>
-            <a:spLocks noGrp="1"/>
-          </p:cNvSpPr>
-          <p:nvPr/>
-        </p:nvSpPr>
-        <p:spPr>
-          <a:xfrm>
-            <a:off x="400050" y="2305050"/>
-            <a:ext cx="66675" cy="3390900"/>
-          </a:xfrm>
-          <a:prstGeom prst="rect">
-            <a:avLst/>
-          </a:prstGeom>
-          <a:solidFill>
-            <a:srgbClr val="DE3840"/>
-          </a:solidFill>
-          <a:ln w="0">
-            <a:noFill/>
-            <a:prstDash val="solid"/>
-          </a:ln>
-        </p:spPr>
-      </p:sp>
-      <p:sp>
-        <p:nvSpPr>
-          <p:cNvPr id="8" name="reason_body_34_42"/>
-          <p:cNvSpPr>
-            <a:spLocks noGrp="1"/>
-          </p:cNvSpPr>
-          <p:nvPr/>
-        </p:nvSpPr>
-        <p:spPr>
-          <a:xfrm>
-            <a:off x="628650" y="2419350"/>
-            <a:ext cx="5905500" cy="3238500"/>
-          </a:xfrm>
-          <a:prstGeom prst="rect">
-            <a:avLst/>
-          </a:prstGeom>
-          <a:noFill/>
-          <a:ln w="0">
-            <a:noFill/>
-            <a:prstDash val="solid"/>
-          </a:ln>
-        </p:spPr>
-        <p:txBody>
-          <a:bodyPr lIns="0" tIns="0" rIns="0" bIns="0" anchor="t"/>
-          <a:lstStyle/>
-          <a:p>
-            <a:pPr algn="l">
-              <a:defRPr sz="1350" b="0">
-                <a:solidFill>
-                  <a:srgbClr val="5D626C"/>
-                </a:solidFill>
-                <a:latin typeface="微软雅黑" panose="020B0503020204020204" charset="-122"/>
-                <a:ea typeface="微软雅黑" panose="020B0503020204020204" charset="-122"/>
-                <a:cs typeface="微软雅黑" panose="020B0503020204020204" charset="-122"/>
-              </a:defRPr>
-            </a:pPr>
-            <a:r>
-              <a:rPr sz="1350" b="0">
-                <a:solidFill>
-                  <a:srgbClr val="5D626C"/>
-                </a:solidFill>
-                <a:latin typeface="微软雅黑" panose="020B0503020204020204" charset="-122"/>
-                <a:ea typeface="微软雅黑" panose="020B0503020204020204" charset="-122"/>
-                <a:cs typeface="微软雅黑" panose="020B0503020204020204" charset="-122"/>
-              </a:rPr>
-              <a:t>界面提供插入、删除与重置操作。输入一个 key 后，程序调用的仍然是 RBTree&lt;int&gt;::insert 或 RBTree&lt;int&gt;::remove。</a:t>
-            </a:r>
-            <a:endParaRPr sz="1350" b="0">
-              <a:solidFill>
-                <a:srgbClr val="5D626C"/>
+          <a:p>
+            <a:endParaRPr sz="1875"/>
+          </a:p>
+          <a:p>
+            <a:pPr algn="ctr">
+              <a:defRPr sz="1875" b="1">
+                <a:solidFill>
+                  <a:srgbClr val="17181C"/>
+                </a:solidFill>
+                <a:latin typeface="微软雅黑" panose="020B0503020204020204" charset="-122"/>
+                <a:ea typeface="微软雅黑" panose="020B0503020204020204" charset="-122"/>
+                <a:cs typeface="微软雅黑" panose="020B0503020204020204" charset="-122"/>
+              </a:defRPr>
+            </a:pPr>
+            <a:r>
+              <a:rPr sz="1875" b="1">
+                <a:solidFill>
+                  <a:srgbClr val="17181C"/>
+                </a:solidFill>
+                <a:latin typeface="微软雅黑" panose="020B0503020204020204" charset="-122"/>
+                <a:ea typeface="微软雅黑" panose="020B0503020204020204" charset="-122"/>
+                <a:cs typeface="微软雅黑" panose="020B0503020204020204" charset="-122"/>
+              </a:rPr>
+              <a:t>插入 key</a:t>
+            </a:r>
+            <a:endParaRPr sz="1875" b="1">
+              <a:solidFill>
+                <a:srgbClr val="17181C"/>
               </a:solidFill>
               <a:latin typeface="微软雅黑" panose="020B0503020204020204" charset="-122"/>
               <a:ea typeface="微软雅黑" panose="020B0503020204020204" charset="-122"/>
@@ -36620,33 +36534,30 @@
             </a:endParaRPr>
           </a:p>
           <a:p>
-            <a:endParaRPr sz="1350"/>
-          </a:p>
-          <a:p>
-            <a:pPr algn="l">
-              <a:defRPr sz="1350" b="0">
-                <a:solidFill>
-                  <a:srgbClr val="5D626C"/>
-                </a:solidFill>
-                <a:latin typeface="微软雅黑" panose="020B0503020204020204" charset="-122"/>
-                <a:ea typeface="微软雅黑" panose="020B0503020204020204" charset="-122"/>
-                <a:cs typeface="微软雅黑" panose="020B0503020204020204" charset="-122"/>
-              </a:defRPr>
-            </a:pPr>
-            <a:r>
-              <a:rPr sz="1350" b="0">
-                <a:solidFill>
-                  <a:srgbClr val="5D626C"/>
-                </a:solidFill>
-                <a:latin typeface="微软雅黑" panose="020B0503020204020204" charset="-122"/>
-                <a:ea typeface="微软雅黑" panose="020B0503020204020204" charset="-122"/>
-                <a:cs typeface="微软雅黑" panose="020B0503020204020204" charset="-122"/>
-              </a:rPr>
-              <a:t>屏幕上的节点移动和颜色变化只是后端算法结果的可视化。答辩时我不会解释窗口消息、按钮坐标、绘图 API 或布局算法，而是根据操作结果回到 rbtree.h：当前命中了哪一种局部形态，执行了哪次换色或旋转，为什么红黑性质重新成立。</a:t>
-            </a:r>
-            <a:endParaRPr sz="1350" b="0">
-              <a:solidFill>
-                <a:srgbClr val="5D626C"/>
+            <a:pPr algn="ctr">
+              <a:defRPr sz="1875" b="1">
+                <a:solidFill>
+                  <a:srgbClr val="17181C"/>
+                </a:solidFill>
+                <a:latin typeface="微软雅黑" panose="020B0503020204020204" charset="-122"/>
+                <a:ea typeface="微软雅黑" panose="020B0503020204020204" charset="-122"/>
+                <a:cs typeface="微软雅黑" panose="020B0503020204020204" charset="-122"/>
+              </a:defRPr>
+            </a:pPr>
+            <a:r>
+              <a:rPr sz="1875" b="1">
+                <a:solidFill>
+                  <a:srgbClr val="17181C"/>
+                </a:solidFill>
+                <a:latin typeface="微软雅黑" panose="020B0503020204020204" charset="-122"/>
+                <a:ea typeface="微软雅黑" panose="020B0503020204020204" charset="-122"/>
+                <a:cs typeface="微软雅黑" panose="020B0503020204020204" charset="-122"/>
+              </a:rPr>
+              <a:t>删除 key</a:t>
+            </a:r>
+            <a:endParaRPr sz="1875" b="1">
+              <a:solidFill>
+                <a:srgbClr val="17181C"/>
               </a:solidFill>
               <a:latin typeface="微软雅黑" panose="020B0503020204020204" charset="-122"/>
               <a:ea typeface="微软雅黑" panose="020B0503020204020204" charset="-122"/>
@@ -36654,69 +36565,6 @@
             </a:endParaRPr>
           </a:p>
           <a:p>
-            <a:endParaRPr sz="1350"/>
-          </a:p>
-          <a:p>
-            <a:pPr algn="l">
-              <a:defRPr sz="1350" b="0">
-                <a:solidFill>
-                  <a:srgbClr val="5D626C"/>
-                </a:solidFill>
-                <a:latin typeface="微软雅黑" panose="020B0503020204020204" charset="-122"/>
-                <a:ea typeface="微软雅黑" panose="020B0503020204020204" charset="-122"/>
-                <a:cs typeface="微软雅黑" panose="020B0503020204020204" charset="-122"/>
-              </a:defRPr>
-            </a:pPr>
-            <a:r>
-              <a:rPr sz="1350" b="0">
-                <a:solidFill>
-                  <a:srgbClr val="5D626C"/>
-                </a:solidFill>
-                <a:latin typeface="微软雅黑" panose="020B0503020204020204" charset="-122"/>
-                <a:ea typeface="微软雅黑" panose="020B0503020204020204" charset="-122"/>
-                <a:cs typeface="微软雅黑" panose="020B0503020204020204" charset="-122"/>
-              </a:rPr>
-              <a:t>也就是说，EasyX 是演示工具，不是本次答辩的技术重点。</a:t>
-            </a:r>
-            <a:endParaRPr sz="1350" b="0">
-              <a:solidFill>
-                <a:srgbClr val="5D626C"/>
-              </a:solidFill>
-              <a:latin typeface="微软雅黑" panose="020B0503020204020204" charset="-122"/>
-              <a:ea typeface="微软雅黑" panose="020B0503020204020204" charset="-122"/>
-              <a:cs typeface="微软雅黑" panose="020B0503020204020204" charset="-122"/>
-            </a:endParaRPr>
-          </a:p>
-        </p:txBody>
-      </p:sp>
-      <p:sp>
-        <p:nvSpPr>
-          <p:cNvPr id="9" name="easyx_scope"/>
-          <p:cNvSpPr>
-            <a:spLocks noGrp="1"/>
-          </p:cNvSpPr>
-          <p:nvPr/>
-        </p:nvSpPr>
-        <p:spPr>
-          <a:xfrm>
-            <a:off x="7810500" y="2143125"/>
-            <a:ext cx="2571750" cy="2095500"/>
-          </a:xfrm>
-          <a:prstGeom prst="rect">
-            <a:avLst/>
-          </a:prstGeom>
-          <a:solidFill>
-            <a:srgbClr val="F2F3F5"/>
-          </a:solidFill>
-          <a:ln w="0">
-            <a:noFill/>
-            <a:prstDash val="solid"/>
-          </a:ln>
-        </p:spPr>
-        <p:txBody>
-          <a:bodyPr lIns="0" tIns="0" rIns="0" bIns="0" anchor="t"/>
-          <a:lstStyle/>
-          <a:p>
             <a:pPr algn="ctr">
               <a:defRPr sz="1875" b="1">
                 <a:solidFill>
@@ -36736,165 +36584,11 @@
                 <a:ea typeface="微软雅黑" panose="020B0503020204020204" charset="-122"/>
                 <a:cs typeface="微软雅黑" panose="020B0503020204020204" charset="-122"/>
               </a:rPr>
-              <a:t>演示操作</a:t>
+              <a:t>重置示例树</a:t>
             </a:r>
             <a:endParaRPr sz="1875" b="1">
               <a:solidFill>
                 <a:srgbClr val="17181C"/>
-              </a:solidFill>
-              <a:latin typeface="微软雅黑" panose="020B0503020204020204" charset="-122"/>
-              <a:ea typeface="微软雅黑" panose="020B0503020204020204" charset="-122"/>
-              <a:cs typeface="微软雅黑" panose="020B0503020204020204" charset="-122"/>
-            </a:endParaRPr>
-          </a:p>
-          <a:p>
-            <a:endParaRPr sz="1875"/>
-          </a:p>
-          <a:p>
-            <a:pPr algn="ctr">
-              <a:defRPr sz="1875" b="1">
-                <a:solidFill>
-                  <a:srgbClr val="17181C"/>
-                </a:solidFill>
-                <a:latin typeface="微软雅黑" panose="020B0503020204020204" charset="-122"/>
-                <a:ea typeface="微软雅黑" panose="020B0503020204020204" charset="-122"/>
-                <a:cs typeface="微软雅黑" panose="020B0503020204020204" charset="-122"/>
-              </a:defRPr>
-            </a:pPr>
-            <a:r>
-              <a:rPr sz="1875" b="1">
-                <a:solidFill>
-                  <a:srgbClr val="17181C"/>
-                </a:solidFill>
-                <a:latin typeface="微软雅黑" panose="020B0503020204020204" charset="-122"/>
-                <a:ea typeface="微软雅黑" panose="020B0503020204020204" charset="-122"/>
-                <a:cs typeface="微软雅黑" panose="020B0503020204020204" charset="-122"/>
-              </a:rPr>
-              <a:t>插入 key</a:t>
-            </a:r>
-            <a:endParaRPr sz="1875" b="1">
-              <a:solidFill>
-                <a:srgbClr val="17181C"/>
-              </a:solidFill>
-              <a:latin typeface="微软雅黑" panose="020B0503020204020204" charset="-122"/>
-              <a:ea typeface="微软雅黑" panose="020B0503020204020204" charset="-122"/>
-              <a:cs typeface="微软雅黑" panose="020B0503020204020204" charset="-122"/>
-            </a:endParaRPr>
-          </a:p>
-          <a:p>
-            <a:pPr algn="ctr">
-              <a:defRPr sz="1875" b="1">
-                <a:solidFill>
-                  <a:srgbClr val="17181C"/>
-                </a:solidFill>
-                <a:latin typeface="微软雅黑" panose="020B0503020204020204" charset="-122"/>
-                <a:ea typeface="微软雅黑" panose="020B0503020204020204" charset="-122"/>
-                <a:cs typeface="微软雅黑" panose="020B0503020204020204" charset="-122"/>
-              </a:defRPr>
-            </a:pPr>
-            <a:r>
-              <a:rPr sz="1875" b="1">
-                <a:solidFill>
-                  <a:srgbClr val="17181C"/>
-                </a:solidFill>
-                <a:latin typeface="微软雅黑" panose="020B0503020204020204" charset="-122"/>
-                <a:ea typeface="微软雅黑" panose="020B0503020204020204" charset="-122"/>
-                <a:cs typeface="微软雅黑" panose="020B0503020204020204" charset="-122"/>
-              </a:rPr>
-              <a:t>删除 key</a:t>
-            </a:r>
-            <a:endParaRPr sz="1875" b="1">
-              <a:solidFill>
-                <a:srgbClr val="17181C"/>
-              </a:solidFill>
-              <a:latin typeface="微软雅黑" panose="020B0503020204020204" charset="-122"/>
-              <a:ea typeface="微软雅黑" panose="020B0503020204020204" charset="-122"/>
-              <a:cs typeface="微软雅黑" panose="020B0503020204020204" charset="-122"/>
-            </a:endParaRPr>
-          </a:p>
-          <a:p>
-            <a:pPr algn="ctr">
-              <a:defRPr sz="1875" b="1">
-                <a:solidFill>
-                  <a:srgbClr val="17181C"/>
-                </a:solidFill>
-                <a:latin typeface="微软雅黑" panose="020B0503020204020204" charset="-122"/>
-                <a:ea typeface="微软雅黑" panose="020B0503020204020204" charset="-122"/>
-                <a:cs typeface="微软雅黑" panose="020B0503020204020204" charset="-122"/>
-              </a:defRPr>
-            </a:pPr>
-            <a:r>
-              <a:rPr sz="1875" b="1">
-                <a:solidFill>
-                  <a:srgbClr val="17181C"/>
-                </a:solidFill>
-                <a:latin typeface="微软雅黑" panose="020B0503020204020204" charset="-122"/>
-                <a:ea typeface="微软雅黑" panose="020B0503020204020204" charset="-122"/>
-                <a:cs typeface="微软雅黑" panose="020B0503020204020204" charset="-122"/>
-              </a:rPr>
-              <a:t>重置示例树</a:t>
-            </a:r>
-            <a:endParaRPr sz="1875" b="1">
-              <a:solidFill>
-                <a:srgbClr val="17181C"/>
-              </a:solidFill>
-              <a:latin typeface="微软雅黑" panose="020B0503020204020204" charset="-122"/>
-              <a:ea typeface="微软雅黑" panose="020B0503020204020204" charset="-122"/>
-              <a:cs typeface="微软雅黑" panose="020B0503020204020204" charset="-122"/>
-            </a:endParaRPr>
-          </a:p>
-        </p:txBody>
-      </p:sp>
-      <p:sp>
-        <p:nvSpPr>
-          <p:cNvPr id="10" name="takeaway_34"/>
-          <p:cNvSpPr>
-            <a:spLocks noGrp="1"/>
-          </p:cNvSpPr>
-          <p:nvPr/>
-        </p:nvSpPr>
-        <p:spPr>
-          <a:xfrm>
-            <a:off x="1047750" y="5953125"/>
-            <a:ext cx="10096500" cy="400050"/>
-          </a:xfrm>
-          <a:prstGeom prst="rect">
-            <a:avLst/>
-          </a:prstGeom>
-          <a:noFill/>
-          <a:ln w="0">
-            <a:noFill/>
-            <a:prstDash val="solid"/>
-          </a:ln>
-        </p:spPr>
-        <p:txBody>
-          <a:bodyPr lIns="0" tIns="0" rIns="0" bIns="0" anchor="t"/>
-          <a:lstStyle/>
-          <a:p>
-            <a:pPr algn="ctr">
-              <a:defRPr sz="1575" b="1">
-                <a:solidFill>
-                  <a:srgbClr val="DE3840"/>
-                </a:solidFill>
-                <a:latin typeface="微软雅黑" panose="020B0503020204020204" charset="-122"/>
-                <a:ea typeface="微软雅黑" panose="020B0503020204020204" charset="-122"/>
-                <a:cs typeface="微软雅黑" panose="020B0503020204020204" charset="-122"/>
-              </a:defRPr>
-            </a:pPr>
-            <a:r>
-              <a:rPr sz="1575" b="1">
-                <a:solidFill>
-                  <a:srgbClr val="DE3840"/>
-                </a:solidFill>
-                <a:latin typeface="微软雅黑" panose="020B0503020204020204" charset="-122"/>
-                <a:ea typeface="微软雅黑" panose="020B0503020204020204" charset="-122"/>
-                <a:cs typeface="微软雅黑" panose="020B0503020204020204" charset="-122"/>
-              </a:rPr>
-              <a:t>被问到界面时只需说明：使用 EasyX 实现，核心数据与操作来自后端 RBTree。</a:t>
-            </a:r>
-            <a:endParaRPr sz="1575" b="1">
-              <a:solidFill>
-                <a:srgbClr val="DE3840"/>
               </a:solidFill>
               <a:latin typeface="微软雅黑" panose="020B0503020204020204" charset="-122"/>
               <a:ea typeface="微软雅黑" panose="020B0503020204020204" charset="-122"/>
@@ -39867,16 +39561,16 @@
       <p:grpSpPr/>
       <p:sp>
         <p:nvSpPr>
-          <p:cNvPr id="2" name="section_38"/>
-          <p:cNvSpPr>
-            <a:spLocks noGrp="1"/>
-          </p:cNvSpPr>
-          <p:nvPr/>
-        </p:nvSpPr>
-        <p:spPr>
-          <a:xfrm>
-            <a:off x="400050" y="257175"/>
-            <a:ext cx="3048000" cy="228600"/>
+          <p:cNvPr id="2" name="end_section"/>
+          <p:cNvSpPr>
+            <a:spLocks noGrp="1"/>
+          </p:cNvSpPr>
+          <p:nvPr/>
+        </p:nvSpPr>
+        <p:spPr>
+          <a:xfrm>
+            <a:off x="400050" y="381000"/>
+            <a:ext cx="2476500" cy="228600"/>
           </a:xfrm>
           <a:prstGeom prst="rect">
             <a:avLst/>
@@ -39910,7 +39604,29 @@
                 <a:ea typeface="微软雅黑" panose="020B0503020204020204" charset="-122"/>
                 <a:cs typeface="微软雅黑" panose="020B0503020204020204" charset="-122"/>
               </a:rPr>
-              <a:t>12 · 局限与扩展</a:t>
+              <a:t>1</a:t>
+            </a:r>
+            <a:r>
+              <a:rPr lang="en-US" sz="1050" b="1">
+                <a:solidFill>
+                  <a:srgbClr val="5D626C"/>
+                </a:solidFill>
+                <a:latin typeface="微软雅黑" panose="020B0503020204020204" charset="-122"/>
+                <a:ea typeface="微软雅黑" panose="020B0503020204020204" charset="-122"/>
+                <a:cs typeface="微软雅黑" panose="020B0503020204020204" charset="-122"/>
+              </a:rPr>
+              <a:t>2</a:t>
+            </a:r>
+            <a:r>
+              <a:rPr sz="1050" b="1">
+                <a:solidFill>
+                  <a:srgbClr val="5D626C"/>
+                </a:solidFill>
+                <a:latin typeface="微软雅黑" panose="020B0503020204020204" charset="-122"/>
+                <a:ea typeface="微软雅黑" panose="020B0503020204020204" charset="-122"/>
+                <a:cs typeface="微软雅黑" panose="020B0503020204020204" charset="-122"/>
+              </a:rPr>
+              <a:t> · 总结</a:t>
             </a:r>
             <a:endParaRPr sz="1050" b="1">
               <a:solidFill>
@@ -39925,16 +39641,16 @@
       </p:sp>
       <p:sp>
         <p:nvSpPr>
-          <p:cNvPr id="3" name="heading_38"/>
-          <p:cNvSpPr>
-            <a:spLocks noGrp="1"/>
-          </p:cNvSpPr>
-          <p:nvPr/>
-        </p:nvSpPr>
-        <p:spPr>
-          <a:xfrm>
-            <a:off x="400050" y="590550"/>
-            <a:ext cx="11287125" cy="552450"/>
+          <p:cNvPr id="3" name="end_title"/>
+          <p:cNvSpPr>
+            <a:spLocks noGrp="1"/>
+          </p:cNvSpPr>
+          <p:nvPr/>
+        </p:nvSpPr>
+        <p:spPr>
+          <a:xfrm>
+            <a:off x="400050" y="1000125"/>
+            <a:ext cx="8096250" cy="619125"/>
           </a:xfrm>
           <a:prstGeom prst="rect">
             <a:avLst/>
@@ -39950,7 +39666,7 @@
           <a:lstStyle/>
           <a:p>
             <a:pPr algn="l">
-              <a:defRPr sz="2700" b="1">
+              <a:defRPr sz="3300" b="1">
                 <a:solidFill>
                   <a:srgbClr val="17181C"/>
                 </a:solidFill>
@@ -39959,18 +39675,7 @@
                 <a:cs typeface="微软雅黑" panose="020B0503020204020204" charset="-122"/>
               </a:defRPr>
             </a:pPr>
-            <a:r>
-              <a:rPr sz="2700" b="1">
-                <a:solidFill>
-                  <a:srgbClr val="17181C"/>
-                </a:solidFill>
-                <a:latin typeface="微软雅黑" panose="020B0503020204020204" charset="-122"/>
-                <a:ea typeface="微软雅黑" panose="020B0503020204020204" charset="-122"/>
-                <a:cs typeface="微软雅黑" panose="020B0503020204020204" charset="-122"/>
-              </a:rPr>
-              <a:t>DOUBLE_BLACK 使用 (T)0：模板表面通用，实际仍要求 T 能由 0 构造</a:t>
-            </a:r>
-            <a:endParaRPr sz="2700" b="1">
+            <a:endParaRPr sz="3300" b="1">
               <a:solidFill>
                 <a:srgbClr val="17181C"/>
               </a:solidFill>
@@ -39983,32 +39688,266 @@
       </p:sp>
       <p:sp>
         <p:nvSpPr>
-          <p:cNvPr id="4" name="rule_38"/>
-          <p:cNvSpPr>
-            <a:spLocks noGrp="1"/>
-          </p:cNvSpPr>
-          <p:nvPr/>
-        </p:nvSpPr>
-        <p:spPr>
-          <a:xfrm>
-            <a:off x="400050" y="1352550"/>
-            <a:ext cx="11391900" cy="19050"/>
-          </a:xfrm>
-          <a:prstGeom prst="rect">
-            <a:avLst/>
-          </a:prstGeom>
-          <a:solidFill>
-            <a:srgbClr val="17181C"/>
-          </a:solidFill>
-          <a:ln w="0">
-            <a:noFill/>
-            <a:prstDash val="solid"/>
-          </a:ln>
-        </p:spPr>
-      </p:sp>
-      <p:sp>
-        <p:nvSpPr>
-          <p:cNvPr id="5" name="footer_38"/>
+          <p:cNvPr id="4" name="question_40_42"/>
+          <p:cNvSpPr>
+            <a:spLocks noGrp="1"/>
+          </p:cNvSpPr>
+          <p:nvPr/>
+        </p:nvSpPr>
+        <p:spPr>
+          <a:xfrm>
+            <a:off x="695325" y="1988820"/>
+            <a:ext cx="7143750" cy="533400"/>
+          </a:xfrm>
+          <a:prstGeom prst="rect">
+            <a:avLst/>
+          </a:prstGeom>
+          <a:noFill/>
+          <a:ln w="0">
+            <a:noFill/>
+            <a:prstDash val="solid"/>
+          </a:ln>
+        </p:spPr>
+        <p:txBody>
+          <a:bodyPr lIns="0" tIns="0" rIns="0" bIns="0" anchor="t"/>
+          <a:lstStyle/>
+          <a:p>
+            <a:pPr algn="l">
+              <a:defRPr sz="1800" b="1">
+                <a:solidFill>
+                  <a:srgbClr val="DE3840"/>
+                </a:solidFill>
+                <a:latin typeface="微软雅黑" panose="020B0503020204020204" charset="-122"/>
+                <a:ea typeface="微软雅黑" panose="020B0503020204020204" charset="-122"/>
+                <a:cs typeface="微软雅黑" panose="020B0503020204020204" charset="-122"/>
+              </a:defRPr>
+            </a:pPr>
+            <a:r>
+              <a:rPr sz="1800" b="1">
+                <a:solidFill>
+                  <a:srgbClr val="DE3840"/>
+                </a:solidFill>
+                <a:latin typeface="微软雅黑" panose="020B0503020204020204" charset="-122"/>
+                <a:ea typeface="微软雅黑" panose="020B0503020204020204" charset="-122"/>
+                <a:cs typeface="微软雅黑" panose="020B0503020204020204" charset="-122"/>
+              </a:rPr>
+              <a:t>红黑树</a:t>
+            </a:r>
+            <a:r>
+              <a:rPr lang="zh-CN" sz="1800" b="1">
+                <a:solidFill>
+                  <a:srgbClr val="DE3840"/>
+                </a:solidFill>
+                <a:latin typeface="微软雅黑" panose="020B0503020204020204" charset="-122"/>
+                <a:ea typeface="微软雅黑" panose="020B0503020204020204" charset="-122"/>
+                <a:cs typeface="微软雅黑" panose="020B0503020204020204" charset="-122"/>
+              </a:rPr>
+              <a:t>作为最难掌握的高级数据结构之一，</a:t>
+            </a:r>
+            <a:r>
+              <a:rPr lang="zh-CN" altLang="en-US">
+                <a:latin typeface="Google Sans"/>
+                <a:ea typeface="Google Sans"/>
+                <a:sym typeface="+mn-ea"/>
+              </a:rPr>
+              <a:t>理论晦涩</a:t>
+            </a:r>
+            <a:r>
+              <a:rPr lang="zh-CN" altLang="en-US">
+                <a:sym typeface="+mn-ea"/>
+              </a:rPr>
+              <a:t>、</a:t>
+            </a:r>
+            <a:r>
+              <a:rPr lang="zh-CN" altLang="en-US">
+                <a:latin typeface="Google Sans"/>
+                <a:ea typeface="Google Sans"/>
+                <a:sym typeface="+mn-ea"/>
+              </a:rPr>
+              <a:t>边缘情况繁多</a:t>
+            </a:r>
+            <a:r>
+              <a:rPr lang="zh-CN" altLang="en-US">
+                <a:sym typeface="+mn-ea"/>
+              </a:rPr>
+              <a:t>以及</a:t>
+            </a:r>
+            <a:r>
+              <a:rPr lang="zh-CN" altLang="en-US">
+                <a:latin typeface="Google Sans"/>
+                <a:ea typeface="Google Sans"/>
+                <a:sym typeface="+mn-ea"/>
+              </a:rPr>
+              <a:t>代码实现极易出错。</a:t>
+            </a:r>
+            <a:endParaRPr lang="zh-CN" altLang="en-US">
+              <a:latin typeface="Google Sans"/>
+              <a:ea typeface="Google Sans"/>
+              <a:sym typeface="+mn-ea"/>
+            </a:endParaRPr>
+          </a:p>
+          <a:p>
+            <a:pPr algn="l">
+              <a:defRPr sz="1800" b="1">
+                <a:solidFill>
+                  <a:srgbClr val="DE3840"/>
+                </a:solidFill>
+                <a:latin typeface="微软雅黑" panose="020B0503020204020204" charset="-122"/>
+                <a:ea typeface="微软雅黑" panose="020B0503020204020204" charset="-122"/>
+                <a:cs typeface="微软雅黑" panose="020B0503020204020204" charset="-122"/>
+              </a:defRPr>
+            </a:pPr>
+            <a:endParaRPr lang="zh-CN" altLang="en-US">
+              <a:latin typeface="Google Sans"/>
+              <a:ea typeface="Google Sans"/>
+              <a:sym typeface="+mn-ea"/>
+            </a:endParaRPr>
+          </a:p>
+          <a:p>
+            <a:pPr algn="l">
+              <a:defRPr sz="1800" b="1">
+                <a:solidFill>
+                  <a:srgbClr val="DE3840"/>
+                </a:solidFill>
+                <a:latin typeface="微软雅黑" panose="020B0503020204020204" charset="-122"/>
+                <a:ea typeface="微软雅黑" panose="020B0503020204020204" charset="-122"/>
+                <a:cs typeface="微软雅黑" panose="020B0503020204020204" charset="-122"/>
+              </a:defRPr>
+            </a:pPr>
+            <a:r>
+              <a:rPr lang="zh-CN" altLang="en-US">
+                <a:latin typeface="Google Sans"/>
+                <a:ea typeface="Google Sans"/>
+                <a:sym typeface="+mn-ea"/>
+              </a:rPr>
+              <a:t>完成这次课程设计的过程中我学会了很多新知识，比如积极使用宏调试才能在这样庞大的代码量中准确发现某处的判断错误，这让我不再只是在源码的逻辑上排查，而是站在一个完整的项目上进行思考。</a:t>
+            </a:r>
+            <a:endParaRPr lang="zh-CN" altLang="en-US">
+              <a:latin typeface="Google Sans"/>
+              <a:ea typeface="Google Sans"/>
+              <a:sym typeface="+mn-ea"/>
+            </a:endParaRPr>
+          </a:p>
+          <a:p>
+            <a:pPr algn="l">
+              <a:defRPr sz="1800" b="1">
+                <a:solidFill>
+                  <a:srgbClr val="DE3840"/>
+                </a:solidFill>
+                <a:latin typeface="微软雅黑" panose="020B0503020204020204" charset="-122"/>
+                <a:ea typeface="微软雅黑" panose="020B0503020204020204" charset="-122"/>
+                <a:cs typeface="微软雅黑" panose="020B0503020204020204" charset="-122"/>
+              </a:defRPr>
+            </a:pPr>
+            <a:endParaRPr lang="zh-CN" altLang="en-US">
+              <a:latin typeface="Google Sans"/>
+              <a:ea typeface="Google Sans"/>
+              <a:sym typeface="+mn-ea"/>
+            </a:endParaRPr>
+          </a:p>
+          <a:p>
+            <a:pPr algn="l">
+              <a:defRPr sz="1800" b="1">
+                <a:solidFill>
+                  <a:srgbClr val="DE3840"/>
+                </a:solidFill>
+                <a:latin typeface="微软雅黑" panose="020B0503020204020204" charset="-122"/>
+                <a:ea typeface="微软雅黑" panose="020B0503020204020204" charset="-122"/>
+                <a:cs typeface="微软雅黑" panose="020B0503020204020204" charset="-122"/>
+              </a:defRPr>
+            </a:pPr>
+            <a:r>
+              <a:rPr lang="zh-CN" altLang="en-US">
+                <a:latin typeface="Google Sans"/>
+                <a:ea typeface="Google Sans"/>
+                <a:sym typeface="+mn-ea"/>
+              </a:rPr>
+              <a:t>同时我</a:t>
+            </a:r>
+            <a:r>
+              <a:rPr lang="zh-CN" altLang="en-US">
+                <a:latin typeface="Google Sans"/>
+                <a:ea typeface="Google Sans"/>
+                <a:sym typeface="+mn-ea"/>
+              </a:rPr>
+              <a:t>也接触到了红黑树的美妙的设计，比如黑</a:t>
+            </a:r>
+            <a:r>
+              <a:rPr lang="en-US" altLang="zh-CN">
+                <a:latin typeface="Google Sans"/>
+                <a:ea typeface="Google Sans"/>
+                <a:sym typeface="+mn-ea"/>
+              </a:rPr>
+              <a:t>1</a:t>
+            </a:r>
+            <a:r>
+              <a:rPr lang="zh-CN" altLang="en-US">
+                <a:latin typeface="Google Sans"/>
+                <a:ea typeface="Google Sans"/>
+                <a:sym typeface="+mn-ea"/>
+              </a:rPr>
+              <a:t>红</a:t>
+            </a:r>
+            <a:r>
+              <a:rPr lang="en-US" altLang="zh-CN">
+                <a:latin typeface="Google Sans"/>
+                <a:ea typeface="Google Sans"/>
+                <a:sym typeface="+mn-ea"/>
+              </a:rPr>
+              <a:t>0</a:t>
+            </a:r>
+            <a:r>
+              <a:rPr lang="zh-CN" altLang="en-US">
+                <a:latin typeface="Google Sans"/>
+                <a:ea typeface="Google Sans"/>
+                <a:sym typeface="+mn-ea"/>
+              </a:rPr>
+              <a:t>的数值来计算树的黑高，</a:t>
+            </a:r>
+            <a:r>
+              <a:rPr lang="zh-CN" altLang="en-US">
+                <a:latin typeface="Google Sans"/>
+                <a:ea typeface="Google Sans"/>
+                <a:sym typeface="+mn-ea"/>
+              </a:rPr>
+              <a:t>以及通过简单的五条规则设计来极大地减少了旋转的频率，每条规则之间都相互联系相互制约，构成了这个复杂的系统的根基。</a:t>
+            </a:r>
+            <a:endParaRPr lang="en-US" altLang="zh-CN">
+              <a:latin typeface="Google Sans"/>
+              <a:ea typeface="Google Sans"/>
+              <a:sym typeface="+mn-ea"/>
+            </a:endParaRPr>
+          </a:p>
+        </p:txBody>
+      </p:sp>
+      <p:sp>
+        <p:nvSpPr>
+          <p:cNvPr id="5" name="reason_bar_40_42"/>
+          <p:cNvSpPr>
+            <a:spLocks noGrp="1"/>
+          </p:cNvSpPr>
+          <p:nvPr/>
+        </p:nvSpPr>
+        <p:spPr>
+          <a:xfrm>
+            <a:off x="400050" y="2562225"/>
+            <a:ext cx="66675" cy="3105150"/>
+          </a:xfrm>
+          <a:prstGeom prst="rect">
+            <a:avLst/>
+          </a:prstGeom>
+          <a:solidFill>
+            <a:srgbClr val="DE3840"/>
+          </a:solidFill>
+          <a:ln w="0">
+            <a:noFill/>
+            <a:prstDash val="solid"/>
+          </a:ln>
+        </p:spPr>
+      </p:sp>
+      <p:sp>
+        <p:nvSpPr>
+          <p:cNvPr id="9" name="end_footer"/>
           <p:cNvSpPr>
             <a:spLocks noGrp="1"/>
           </p:cNvSpPr>
@@ -40051,1830 +39990,11 @@
                 <a:ea typeface="微软雅黑" panose="020B0503020204020204" charset="-122"/>
                 <a:cs typeface="微软雅黑" panose="020B0503020204020204" charset="-122"/>
               </a:rPr>
-              <a:t>38</a:t>
+              <a:t>40</a:t>
             </a:r>
             <a:endParaRPr sz="900" b="0">
               <a:solidFill>
                 <a:srgbClr val="5D626C"/>
-              </a:solidFill>
-              <a:latin typeface="微软雅黑" panose="020B0503020204020204" charset="-122"/>
-              <a:ea typeface="微软雅黑" panose="020B0503020204020204" charset="-122"/>
-              <a:cs typeface="微软雅黑" panose="020B0503020204020204" charset="-122"/>
-            </a:endParaRPr>
-          </a:p>
-        </p:txBody>
-      </p:sp>
-      <p:sp>
-        <p:nvSpPr>
-          <p:cNvPr id="6" name="question_38_42"/>
-          <p:cNvSpPr>
-            <a:spLocks noGrp="1"/>
-          </p:cNvSpPr>
-          <p:nvPr/>
-        </p:nvSpPr>
-        <p:spPr>
-          <a:xfrm>
-            <a:off x="400050" y="1695450"/>
-            <a:ext cx="5905500" cy="533400"/>
-          </a:xfrm>
-          <a:prstGeom prst="rect">
-            <a:avLst/>
-          </a:prstGeom>
-          <a:noFill/>
-          <a:ln w="0">
-            <a:noFill/>
-            <a:prstDash val="solid"/>
-          </a:ln>
-        </p:spPr>
-        <p:txBody>
-          <a:bodyPr lIns="0" tIns="0" rIns="0" bIns="0" anchor="t"/>
-          <a:lstStyle/>
-          <a:p>
-            <a:pPr algn="l">
-              <a:defRPr sz="1800" b="1">
-                <a:solidFill>
-                  <a:srgbClr val="DE3840"/>
-                </a:solidFill>
-                <a:latin typeface="微软雅黑" panose="020B0503020204020204" charset="-122"/>
-                <a:ea typeface="微软雅黑" panose="020B0503020204020204" charset="-122"/>
-                <a:cs typeface="微软雅黑" panose="020B0503020204020204" charset="-122"/>
-              </a:defRPr>
-            </a:pPr>
-            <a:r>
-              <a:rPr sz="1800" b="1">
-                <a:solidFill>
-                  <a:srgbClr val="DE3840"/>
-                </a:solidFill>
-                <a:latin typeface="微软雅黑" panose="020B0503020204020204" charset="-122"/>
-                <a:ea typeface="微软雅黑" panose="020B0503020204020204" charset="-122"/>
-                <a:cs typeface="微软雅黑" panose="020B0503020204020204" charset="-122"/>
-              </a:rPr>
-              <a:t>问题不是 0 会不会被画出来</a:t>
-            </a:r>
-            <a:endParaRPr sz="1800" b="1">
-              <a:solidFill>
-                <a:srgbClr val="DE3840"/>
-              </a:solidFill>
-              <a:latin typeface="微软雅黑" panose="020B0503020204020204" charset="-122"/>
-              <a:ea typeface="微软雅黑" panose="020B0503020204020204" charset="-122"/>
-              <a:cs typeface="微软雅黑" panose="020B0503020204020204" charset="-122"/>
-            </a:endParaRPr>
-          </a:p>
-        </p:txBody>
-      </p:sp>
-      <p:sp>
-        <p:nvSpPr>
-          <p:cNvPr id="7" name="reason_bar_38_42"/>
-          <p:cNvSpPr>
-            <a:spLocks noGrp="1"/>
-          </p:cNvSpPr>
-          <p:nvPr/>
-        </p:nvSpPr>
-        <p:spPr>
-          <a:xfrm>
-            <a:off x="400050" y="2305050"/>
-            <a:ext cx="66675" cy="3629025"/>
-          </a:xfrm>
-          <a:prstGeom prst="rect">
-            <a:avLst/>
-          </a:prstGeom>
-          <a:solidFill>
-            <a:srgbClr val="DE3840"/>
-          </a:solidFill>
-          <a:ln w="0">
-            <a:noFill/>
-            <a:prstDash val="solid"/>
-          </a:ln>
-        </p:spPr>
-      </p:sp>
-      <p:sp>
-        <p:nvSpPr>
-          <p:cNvPr id="8" name="reason_body_38_42"/>
-          <p:cNvSpPr>
-            <a:spLocks noGrp="1"/>
-          </p:cNvSpPr>
-          <p:nvPr/>
-        </p:nvSpPr>
-        <p:spPr>
-          <a:xfrm>
-            <a:off x="628650" y="2419350"/>
-            <a:ext cx="5619750" cy="3476625"/>
-          </a:xfrm>
-          <a:prstGeom prst="rect">
-            <a:avLst/>
-          </a:prstGeom>
-          <a:noFill/>
-          <a:ln w="0">
-            <a:noFill/>
-            <a:prstDash val="solid"/>
-          </a:ln>
-        </p:spPr>
-        <p:txBody>
-          <a:bodyPr lIns="0" tIns="0" rIns="0" bIns="0" anchor="t"/>
-          <a:lstStyle/>
-          <a:p>
-            <a:pPr algn="l">
-              <a:defRPr sz="1350" b="0">
-                <a:solidFill>
-                  <a:srgbClr val="5D626C"/>
-                </a:solidFill>
-                <a:latin typeface="微软雅黑" panose="020B0503020204020204" charset="-122"/>
-                <a:ea typeface="微软雅黑" panose="020B0503020204020204" charset="-122"/>
-                <a:cs typeface="微软雅黑" panose="020B0503020204020204" charset="-122"/>
-              </a:defRPr>
-            </a:pPr>
-            <a:r>
-              <a:rPr sz="1350" b="0">
-                <a:solidFill>
-                  <a:srgbClr val="5D626C"/>
-                </a:solidFill>
-                <a:latin typeface="微软雅黑" panose="020B0503020204020204" charset="-122"/>
-                <a:ea typeface="微软雅黑" panose="020B0503020204020204" charset="-122"/>
-                <a:cs typeface="微软雅黑" panose="020B0503020204020204" charset="-122"/>
-              </a:rPr>
-              <a:t>临时双黑节点在修复完成后会被删除，正常情况下用户看不到它的 key。但模板编译时仍然必须能执行 (T)0。</a:t>
-            </a:r>
-            <a:endParaRPr sz="1350" b="0">
-              <a:solidFill>
-                <a:srgbClr val="5D626C"/>
-              </a:solidFill>
-              <a:latin typeface="微软雅黑" panose="020B0503020204020204" charset="-122"/>
-              <a:ea typeface="微软雅黑" panose="020B0503020204020204" charset="-122"/>
-              <a:cs typeface="微软雅黑" panose="020B0503020204020204" charset="-122"/>
-            </a:endParaRPr>
-          </a:p>
-          <a:p>
-            <a:endParaRPr sz="1350"/>
-          </a:p>
-          <a:p>
-            <a:pPr algn="l">
-              <a:defRPr sz="1350" b="0">
-                <a:solidFill>
-                  <a:srgbClr val="5D626C"/>
-                </a:solidFill>
-                <a:latin typeface="微软雅黑" panose="020B0503020204020204" charset="-122"/>
-                <a:ea typeface="微软雅黑" panose="020B0503020204020204" charset="-122"/>
-                <a:cs typeface="微软雅黑" panose="020B0503020204020204" charset="-122"/>
-              </a:defRPr>
-            </a:pPr>
-            <a:r>
-              <a:rPr sz="1350" b="0">
-                <a:solidFill>
-                  <a:srgbClr val="5D626C"/>
-                </a:solidFill>
-                <a:latin typeface="微软雅黑" panose="020B0503020204020204" charset="-122"/>
-                <a:ea typeface="微软雅黑" panose="020B0503020204020204" charset="-122"/>
-                <a:cs typeface="微软雅黑" panose="020B0503020204020204" charset="-122"/>
-              </a:rPr>
-              <a:t>如果 T 是一个没有整数构造函数的自定义类型，代码甚至无法通过编译。也就是说，RBTree&lt;T&gt; 的接口看起来接受任意可比较类型，删除实现却偷偷增加了“能从 0 构造”的额外约束。</a:t>
-            </a:r>
-            <a:endParaRPr sz="1350" b="0">
-              <a:solidFill>
-                <a:srgbClr val="5D626C"/>
-              </a:solidFill>
-              <a:latin typeface="微软雅黑" panose="020B0503020204020204" charset="-122"/>
-              <a:ea typeface="微软雅黑" panose="020B0503020204020204" charset="-122"/>
-              <a:cs typeface="微软雅黑" panose="020B0503020204020204" charset="-122"/>
-            </a:endParaRPr>
-          </a:p>
-          <a:p>
-            <a:endParaRPr sz="1350"/>
-          </a:p>
-          <a:p>
-            <a:pPr algn="l">
-              <a:defRPr sz="1350" b="0">
-                <a:solidFill>
-                  <a:srgbClr val="5D626C"/>
-                </a:solidFill>
-                <a:latin typeface="微软雅黑" panose="020B0503020204020204" charset="-122"/>
-                <a:ea typeface="微软雅黑" panose="020B0503020204020204" charset="-122"/>
-                <a:cs typeface="微软雅黑" panose="020B0503020204020204" charset="-122"/>
-              </a:defRPr>
-            </a:pPr>
-            <a:r>
-              <a:rPr sz="1350" b="0">
-                <a:solidFill>
-                  <a:srgbClr val="5D626C"/>
-                </a:solidFill>
-                <a:latin typeface="微软雅黑" panose="020B0503020204020204" charset="-122"/>
-                <a:ea typeface="微软雅黑" panose="020B0503020204020204" charset="-122"/>
-                <a:cs typeface="微软雅黑" panose="020B0503020204020204" charset="-122"/>
-              </a:rPr>
-              <a:t>更稳妥的设计是使用统一哨兵 NIL。空叶子不再用 NULL 表示，而是由真实的黑色哨兵节点表示；它可以保存 parent，又不需要伪造业务 key。</a:t>
-            </a:r>
-            <a:endParaRPr sz="1350" b="0">
-              <a:solidFill>
-                <a:srgbClr val="5D626C"/>
-              </a:solidFill>
-              <a:latin typeface="微软雅黑" panose="020B0503020204020204" charset="-122"/>
-              <a:ea typeface="微软雅黑" panose="020B0503020204020204" charset="-122"/>
-              <a:cs typeface="微软雅黑" panose="020B0503020204020204" charset="-122"/>
-            </a:endParaRPr>
-          </a:p>
-        </p:txBody>
-      </p:sp>
-      <p:sp>
-        <p:nvSpPr>
-          <p:cNvPr id="9" name="code_bg_38_680"/>
-          <p:cNvSpPr>
-            <a:spLocks noGrp="1"/>
-          </p:cNvSpPr>
-          <p:nvPr/>
-        </p:nvSpPr>
-        <p:spPr>
-          <a:xfrm>
-            <a:off x="6477000" y="1952625"/>
-            <a:ext cx="4762500" cy="2143125"/>
-          </a:xfrm>
-          <a:prstGeom prst="rect">
-            <a:avLst/>
-          </a:prstGeom>
-          <a:solidFill>
-            <a:srgbClr val="202126"/>
-          </a:solidFill>
-          <a:ln w="0">
-            <a:noFill/>
-            <a:prstDash val="solid"/>
-          </a:ln>
-        </p:spPr>
-      </p:sp>
-      <p:sp>
-        <p:nvSpPr>
-          <p:cNvPr id="10" name="code_line_38_0"/>
-          <p:cNvSpPr>
-            <a:spLocks noGrp="1"/>
-          </p:cNvSpPr>
-          <p:nvPr/>
-        </p:nvSpPr>
-        <p:spPr>
-          <a:xfrm>
-            <a:off x="6638925" y="2047875"/>
-            <a:ext cx="4476750" cy="238125"/>
-          </a:xfrm>
-          <a:prstGeom prst="rect">
-            <a:avLst/>
-          </a:prstGeom>
-          <a:noFill/>
-          <a:ln w="0">
-            <a:noFill/>
-            <a:prstDash val="solid"/>
-          </a:ln>
-        </p:spPr>
-        <p:txBody>
-          <a:bodyPr lIns="0" tIns="0" rIns="0" bIns="0" anchor="t"/>
-          <a:lstStyle/>
-          <a:p>
-            <a:pPr algn="l">
-              <a:defRPr sz="975" b="0">
-                <a:solidFill>
-                  <a:srgbClr val="E7E7EA"/>
-                </a:solidFill>
-                <a:latin typeface="Consolas" panose="020B0609020204030204"/>
-                <a:ea typeface="Consolas" panose="020B0609020204030204"/>
-                <a:cs typeface="Consolas" panose="020B0609020204030204"/>
-              </a:defRPr>
-            </a:pPr>
-            <a:r>
-              <a:rPr sz="975" b="0">
-                <a:solidFill>
-                  <a:srgbClr val="E7E7EA"/>
-                </a:solidFill>
-                <a:latin typeface="Consolas" panose="020B0609020204030204"/>
-                <a:ea typeface="Consolas" panose="020B0609020204030204"/>
-                <a:cs typeface="Consolas" panose="020B0609020204030204"/>
-              </a:rPr>
-              <a:t>// 当前写法</a:t>
-            </a:r>
-            <a:endParaRPr sz="975" b="0">
-              <a:solidFill>
-                <a:srgbClr val="E7E7EA"/>
-              </a:solidFill>
-              <a:latin typeface="Consolas" panose="020B0609020204030204"/>
-              <a:ea typeface="Consolas" panose="020B0609020204030204"/>
-              <a:cs typeface="Consolas" panose="020B0609020204030204"/>
-            </a:endParaRPr>
-          </a:p>
-        </p:txBody>
-      </p:sp>
-      <p:sp>
-        <p:nvSpPr>
-          <p:cNvPr id="11" name="code_hl_38_1"/>
-          <p:cNvSpPr>
-            <a:spLocks noGrp="1"/>
-          </p:cNvSpPr>
-          <p:nvPr/>
-        </p:nvSpPr>
-        <p:spPr>
-          <a:xfrm>
-            <a:off x="6553200" y="2295525"/>
-            <a:ext cx="4610100" cy="238125"/>
-          </a:xfrm>
-          <a:prstGeom prst="rect">
-            <a:avLst/>
-          </a:prstGeom>
-          <a:solidFill>
-            <a:srgbClr val="56362F"/>
-          </a:solidFill>
-          <a:ln w="0">
-            <a:noFill/>
-            <a:prstDash val="solid"/>
-          </a:ln>
-        </p:spPr>
-      </p:sp>
-      <p:sp>
-        <p:nvSpPr>
-          <p:cNvPr id="12" name="code_line_38_1"/>
-          <p:cNvSpPr>
-            <a:spLocks noGrp="1"/>
-          </p:cNvSpPr>
-          <p:nvPr/>
-        </p:nvSpPr>
-        <p:spPr>
-          <a:xfrm>
-            <a:off x="6638925" y="2286000"/>
-            <a:ext cx="4476750" cy="238125"/>
-          </a:xfrm>
-          <a:prstGeom prst="rect">
-            <a:avLst/>
-          </a:prstGeom>
-          <a:noFill/>
-          <a:ln w="0">
-            <a:noFill/>
-            <a:prstDash val="solid"/>
-          </a:ln>
-        </p:spPr>
-        <p:txBody>
-          <a:bodyPr lIns="0" tIns="0" rIns="0" bIns="0" anchor="t"/>
-          <a:lstStyle/>
-          <a:p>
-            <a:pPr algn="l">
-              <a:defRPr sz="975" b="0">
-                <a:solidFill>
-                  <a:srgbClr val="FFD1BF"/>
-                </a:solidFill>
-                <a:latin typeface="Consolas" panose="020B0609020204030204"/>
-                <a:ea typeface="Consolas" panose="020B0609020204030204"/>
-                <a:cs typeface="Consolas" panose="020B0609020204030204"/>
-              </a:defRPr>
-            </a:pPr>
-            <a:r>
-              <a:rPr sz="975" b="0">
-                <a:solidFill>
-                  <a:srgbClr val="FFD1BF"/>
-                </a:solidFill>
-                <a:latin typeface="Consolas" panose="020B0609020204030204"/>
-                <a:ea typeface="Consolas" panose="020B0609020204030204"/>
-                <a:cs typeface="Consolas" panose="020B0609020204030204"/>
-              </a:rPr>
-              <a:t>new RBTreeNode((T)0, parent, tree, DOUBLE_BLACK);</a:t>
-            </a:r>
-            <a:endParaRPr sz="975" b="0">
-              <a:solidFill>
-                <a:srgbClr val="FFD1BF"/>
-              </a:solidFill>
-              <a:latin typeface="Consolas" panose="020B0609020204030204"/>
-              <a:ea typeface="Consolas" panose="020B0609020204030204"/>
-              <a:cs typeface="Consolas" panose="020B0609020204030204"/>
-            </a:endParaRPr>
-          </a:p>
-        </p:txBody>
-      </p:sp>
-      <p:sp>
-        <p:nvSpPr>
-          <p:cNvPr id="13" name="code_line_38_2"/>
-          <p:cNvSpPr>
-            <a:spLocks noGrp="1"/>
-          </p:cNvSpPr>
-          <p:nvPr/>
-        </p:nvSpPr>
-        <p:spPr>
-          <a:xfrm>
-            <a:off x="6638925" y="2524125"/>
-            <a:ext cx="4476750" cy="238125"/>
-          </a:xfrm>
-          <a:prstGeom prst="rect">
-            <a:avLst/>
-          </a:prstGeom>
-          <a:noFill/>
-          <a:ln w="0">
-            <a:noFill/>
-            <a:prstDash val="solid"/>
-          </a:ln>
-        </p:spPr>
-        <p:txBody>
-          <a:bodyPr lIns="0" tIns="0" rIns="0" bIns="0" anchor="t"/>
-          <a:lstStyle/>
-          <a:p/>
-        </p:txBody>
-      </p:sp>
-      <p:sp>
-        <p:nvSpPr>
-          <p:cNvPr id="14" name="code_line_38_3"/>
-          <p:cNvSpPr>
-            <a:spLocks noGrp="1"/>
-          </p:cNvSpPr>
-          <p:nvPr/>
-        </p:nvSpPr>
-        <p:spPr>
-          <a:xfrm>
-            <a:off x="6638925" y="2762250"/>
-            <a:ext cx="4476750" cy="238125"/>
-          </a:xfrm>
-          <a:prstGeom prst="rect">
-            <a:avLst/>
-          </a:prstGeom>
-          <a:noFill/>
-          <a:ln w="0">
-            <a:noFill/>
-            <a:prstDash val="solid"/>
-          </a:ln>
-        </p:spPr>
-        <p:txBody>
-          <a:bodyPr lIns="0" tIns="0" rIns="0" bIns="0" anchor="t"/>
-          <a:lstStyle/>
-          <a:p>
-            <a:pPr algn="l">
-              <a:defRPr sz="975" b="0">
-                <a:solidFill>
-                  <a:srgbClr val="E7E7EA"/>
-                </a:solidFill>
-                <a:latin typeface="Consolas" panose="020B0609020204030204"/>
-                <a:ea typeface="Consolas" panose="020B0609020204030204"/>
-                <a:cs typeface="Consolas" panose="020B0609020204030204"/>
-              </a:defRPr>
-            </a:pPr>
-            <a:r>
-              <a:rPr sz="975" b="0">
-                <a:solidFill>
-                  <a:srgbClr val="E7E7EA"/>
-                </a:solidFill>
-                <a:latin typeface="Consolas" panose="020B0609020204030204"/>
-                <a:ea typeface="Consolas" panose="020B0609020204030204"/>
-                <a:cs typeface="Consolas" panose="020B0609020204030204"/>
-              </a:rPr>
-              <a:t>// 可扩展方向</a:t>
-            </a:r>
-            <a:endParaRPr sz="975" b="0">
-              <a:solidFill>
-                <a:srgbClr val="E7E7EA"/>
-              </a:solidFill>
-              <a:latin typeface="Consolas" panose="020B0609020204030204"/>
-              <a:ea typeface="Consolas" panose="020B0609020204030204"/>
-              <a:cs typeface="Consolas" panose="020B0609020204030204"/>
-            </a:endParaRPr>
-          </a:p>
-        </p:txBody>
-      </p:sp>
-      <p:sp>
-        <p:nvSpPr>
-          <p:cNvPr id="15" name="code_hl_38_4"/>
-          <p:cNvSpPr>
-            <a:spLocks noGrp="1"/>
-          </p:cNvSpPr>
-          <p:nvPr/>
-        </p:nvSpPr>
-        <p:spPr>
-          <a:xfrm>
-            <a:off x="6553200" y="3009900"/>
-            <a:ext cx="4610100" cy="238125"/>
-          </a:xfrm>
-          <a:prstGeom prst="rect">
-            <a:avLst/>
-          </a:prstGeom>
-          <a:solidFill>
-            <a:srgbClr val="56362F"/>
-          </a:solidFill>
-          <a:ln w="0">
-            <a:noFill/>
-            <a:prstDash val="solid"/>
-          </a:ln>
-        </p:spPr>
-      </p:sp>
-      <p:sp>
-        <p:nvSpPr>
-          <p:cNvPr id="16" name="code_line_38_4"/>
-          <p:cNvSpPr>
-            <a:spLocks noGrp="1"/>
-          </p:cNvSpPr>
-          <p:nvPr/>
-        </p:nvSpPr>
-        <p:spPr>
-          <a:xfrm>
-            <a:off x="6638925" y="3000375"/>
-            <a:ext cx="4476750" cy="238125"/>
-          </a:xfrm>
-          <a:prstGeom prst="rect">
-            <a:avLst/>
-          </a:prstGeom>
-          <a:noFill/>
-          <a:ln w="0">
-            <a:noFill/>
-            <a:prstDash val="solid"/>
-          </a:ln>
-        </p:spPr>
-        <p:txBody>
-          <a:bodyPr lIns="0" tIns="0" rIns="0" bIns="0" anchor="t"/>
-          <a:lstStyle/>
-          <a:p>
-            <a:pPr algn="l">
-              <a:defRPr sz="975" b="0">
-                <a:solidFill>
-                  <a:srgbClr val="FFD1BF"/>
-                </a:solidFill>
-                <a:latin typeface="Consolas" panose="020B0609020204030204"/>
-                <a:ea typeface="Consolas" panose="020B0609020204030204"/>
-                <a:cs typeface="Consolas" panose="020B0609020204030204"/>
-              </a:defRPr>
-            </a:pPr>
-            <a:r>
-              <a:rPr sz="975" b="0">
-                <a:solidFill>
-                  <a:srgbClr val="FFD1BF"/>
-                </a:solidFill>
-                <a:latin typeface="Consolas" panose="020B0609020204030204"/>
-                <a:ea typeface="Consolas" panose="020B0609020204030204"/>
-                <a:cs typeface="Consolas" panose="020B0609020204030204"/>
-              </a:rPr>
-              <a:t>使用共享或独立 NIL 节点表示空叶子</a:t>
-            </a:r>
-            <a:endParaRPr sz="975" b="0">
-              <a:solidFill>
-                <a:srgbClr val="FFD1BF"/>
-              </a:solidFill>
-              <a:latin typeface="Consolas" panose="020B0609020204030204"/>
-              <a:ea typeface="Consolas" panose="020B0609020204030204"/>
-              <a:cs typeface="Consolas" panose="020B0609020204030204"/>
-            </a:endParaRPr>
-          </a:p>
-        </p:txBody>
-      </p:sp>
-      <p:sp>
-        <p:nvSpPr>
-          <p:cNvPr id="17" name="code_hl_38_5"/>
-          <p:cNvSpPr>
-            <a:spLocks noGrp="1"/>
-          </p:cNvSpPr>
-          <p:nvPr/>
-        </p:nvSpPr>
-        <p:spPr>
-          <a:xfrm>
-            <a:off x="6553200" y="3248025"/>
-            <a:ext cx="4610100" cy="238125"/>
-          </a:xfrm>
-          <a:prstGeom prst="rect">
-            <a:avLst/>
-          </a:prstGeom>
-          <a:solidFill>
-            <a:srgbClr val="56362F"/>
-          </a:solidFill>
-          <a:ln w="0">
-            <a:noFill/>
-            <a:prstDash val="solid"/>
-          </a:ln>
-        </p:spPr>
-      </p:sp>
-      <p:sp>
-        <p:nvSpPr>
-          <p:cNvPr id="18" name="code_line_38_5"/>
-          <p:cNvSpPr>
-            <a:spLocks noGrp="1"/>
-          </p:cNvSpPr>
-          <p:nvPr/>
-        </p:nvSpPr>
-        <p:spPr>
-          <a:xfrm>
-            <a:off x="6638925" y="3238500"/>
-            <a:ext cx="4476750" cy="238125"/>
-          </a:xfrm>
-          <a:prstGeom prst="rect">
-            <a:avLst/>
-          </a:prstGeom>
-          <a:noFill/>
-          <a:ln w="0">
-            <a:noFill/>
-            <a:prstDash val="solid"/>
-          </a:ln>
-        </p:spPr>
-        <p:txBody>
-          <a:bodyPr lIns="0" tIns="0" rIns="0" bIns="0" anchor="t"/>
-          <a:lstStyle/>
-          <a:p>
-            <a:pPr algn="l">
-              <a:defRPr sz="975" b="0">
-                <a:solidFill>
-                  <a:srgbClr val="FFD1BF"/>
-                </a:solidFill>
-                <a:latin typeface="Consolas" panose="020B0609020204030204"/>
-                <a:ea typeface="Consolas" panose="020B0609020204030204"/>
-                <a:cs typeface="Consolas" panose="020B0609020204030204"/>
-              </a:defRPr>
-            </a:pPr>
-            <a:r>
-              <a:rPr sz="975" b="0">
-                <a:solidFill>
-                  <a:srgbClr val="FFD1BF"/>
-                </a:solidFill>
-                <a:latin typeface="Consolas" panose="020B0609020204030204"/>
-                <a:ea typeface="Consolas" panose="020B0609020204030204"/>
-                <a:cs typeface="Consolas" panose="020B0609020204030204"/>
-              </a:rPr>
-              <a:t>NIL-&gt;color = BLACK;</a:t>
-            </a:r>
-            <a:endParaRPr sz="975" b="0">
-              <a:solidFill>
-                <a:srgbClr val="FFD1BF"/>
-              </a:solidFill>
-              <a:latin typeface="Consolas" panose="020B0609020204030204"/>
-              <a:ea typeface="Consolas" panose="020B0609020204030204"/>
-              <a:cs typeface="Consolas" panose="020B0609020204030204"/>
-            </a:endParaRPr>
-          </a:p>
-        </p:txBody>
-      </p:sp>
-      <p:sp>
-        <p:nvSpPr>
-          <p:cNvPr id="19" name="code_hl_38_6"/>
-          <p:cNvSpPr>
-            <a:spLocks noGrp="1"/>
-          </p:cNvSpPr>
-          <p:nvPr/>
-        </p:nvSpPr>
-        <p:spPr>
-          <a:xfrm>
-            <a:off x="6553200" y="3486150"/>
-            <a:ext cx="4610100" cy="238125"/>
-          </a:xfrm>
-          <a:prstGeom prst="rect">
-            <a:avLst/>
-          </a:prstGeom>
-          <a:solidFill>
-            <a:srgbClr val="56362F"/>
-          </a:solidFill>
-          <a:ln w="0">
-            <a:noFill/>
-            <a:prstDash val="solid"/>
-          </a:ln>
-        </p:spPr>
-      </p:sp>
-      <p:sp>
-        <p:nvSpPr>
-          <p:cNvPr id="20" name="code_line_38_6"/>
-          <p:cNvSpPr>
-            <a:spLocks noGrp="1"/>
-          </p:cNvSpPr>
-          <p:nvPr/>
-        </p:nvSpPr>
-        <p:spPr>
-          <a:xfrm>
-            <a:off x="6638925" y="3476625"/>
-            <a:ext cx="4476750" cy="238125"/>
-          </a:xfrm>
-          <a:prstGeom prst="rect">
-            <a:avLst/>
-          </a:prstGeom>
-          <a:noFill/>
-          <a:ln w="0">
-            <a:noFill/>
-            <a:prstDash val="solid"/>
-          </a:ln>
-        </p:spPr>
-        <p:txBody>
-          <a:bodyPr lIns="0" tIns="0" rIns="0" bIns="0" anchor="t"/>
-          <a:lstStyle/>
-          <a:p>
-            <a:pPr algn="l">
-              <a:defRPr sz="975" b="0">
-                <a:solidFill>
-                  <a:srgbClr val="FFD1BF"/>
-                </a:solidFill>
-                <a:latin typeface="Consolas" panose="020B0609020204030204"/>
-                <a:ea typeface="Consolas" panose="020B0609020204030204"/>
-                <a:cs typeface="Consolas" panose="020B0609020204030204"/>
-              </a:defRPr>
-            </a:pPr>
-            <a:r>
-              <a:rPr sz="975" b="0">
-                <a:solidFill>
-                  <a:srgbClr val="FFD1BF"/>
-                </a:solidFill>
-                <a:latin typeface="Consolas" panose="020B0609020204030204"/>
-                <a:ea typeface="Consolas" panose="020B0609020204030204"/>
-                <a:cs typeface="Consolas" panose="020B0609020204030204"/>
-              </a:rPr>
-              <a:t>NIL-&gt;parent = parent;</a:t>
-            </a:r>
-            <a:endParaRPr sz="975" b="0">
-              <a:solidFill>
-                <a:srgbClr val="FFD1BF"/>
-              </a:solidFill>
-              <a:latin typeface="Consolas" panose="020B0609020204030204"/>
-              <a:ea typeface="Consolas" panose="020B0609020204030204"/>
-              <a:cs typeface="Consolas" panose="020B0609020204030204"/>
-            </a:endParaRPr>
-          </a:p>
-        </p:txBody>
-      </p:sp>
-      <p:sp>
-        <p:nvSpPr>
-          <p:cNvPr id="21" name="takeaway_38"/>
-          <p:cNvSpPr>
-            <a:spLocks noGrp="1"/>
-          </p:cNvSpPr>
-          <p:nvPr/>
-        </p:nvSpPr>
-        <p:spPr>
-          <a:xfrm>
-            <a:off x="1047750" y="5953125"/>
-            <a:ext cx="10096500" cy="400050"/>
-          </a:xfrm>
-          <a:prstGeom prst="rect">
-            <a:avLst/>
-          </a:prstGeom>
-          <a:noFill/>
-          <a:ln w="0">
-            <a:noFill/>
-            <a:prstDash val="solid"/>
-          </a:ln>
-        </p:spPr>
-        <p:txBody>
-          <a:bodyPr lIns="0" tIns="0" rIns="0" bIns="0" anchor="t"/>
-          <a:lstStyle/>
-          <a:p>
-            <a:pPr algn="ctr">
-              <a:defRPr sz="1575" b="1">
-                <a:solidFill>
-                  <a:srgbClr val="17181C"/>
-                </a:solidFill>
-                <a:latin typeface="微软雅黑" panose="020B0503020204020204" charset="-122"/>
-                <a:ea typeface="微软雅黑" panose="020B0503020204020204" charset="-122"/>
-                <a:cs typeface="微软雅黑" panose="020B0503020204020204" charset="-122"/>
-              </a:defRPr>
-            </a:pPr>
-            <a:r>
-              <a:rPr sz="1575" b="1">
-                <a:solidFill>
-                  <a:srgbClr val="17181C"/>
-                </a:solidFill>
-                <a:latin typeface="微软雅黑" panose="020B0503020204020204" charset="-122"/>
-                <a:ea typeface="微软雅黑" panose="020B0503020204020204" charset="-122"/>
-                <a:cs typeface="微软雅黑" panose="020B0503020204020204" charset="-122"/>
-              </a:rPr>
-              <a:t>真正的模板约束必须写在接口里，而不是藏在某个删除分支中。</a:t>
-            </a:r>
-            <a:endParaRPr sz="1575" b="1">
-              <a:solidFill>
-                <a:srgbClr val="17181C"/>
-              </a:solidFill>
-              <a:latin typeface="微软雅黑" panose="020B0503020204020204" charset="-122"/>
-              <a:ea typeface="微软雅黑" panose="020B0503020204020204" charset="-122"/>
-              <a:cs typeface="微软雅黑" panose="020B0503020204020204" charset="-122"/>
-            </a:endParaRPr>
-          </a:p>
-        </p:txBody>
-      </p:sp>
-    </p:spTree>
-  </p:cSld>
-  <p:clrMapOvr>
-    <a:masterClrMapping/>
-  </p:clrMapOvr>
-</p:sld>
-</file>
-
-<file path=ppt/slides/slide39.xml><?xml version="1.0" encoding="utf-8"?>
-<p:sld xmlns:a="http://schemas.openxmlformats.org/drawingml/2006/main" xmlns:r="http://schemas.openxmlformats.org/officeDocument/2006/relationships" xmlns:p="http://schemas.openxmlformats.org/presentationml/2006/main">
-  <p:cSld>
-    <p:bg>
-      <p:bgPr>
-        <a:solidFill>
-          <a:srgbClr val="FFFFFF"/>
-        </a:solidFill>
-        <a:effectLst/>
-      </p:bgPr>
-    </p:bg>
-    <p:spTree>
-      <p:nvGrpSpPr>
-        <p:cNvPr id="1" name=""/>
-        <p:cNvGrpSpPr/>
-        <p:nvPr/>
-      </p:nvGrpSpPr>
-      <p:grpSpPr/>
-      <p:sp>
-        <p:nvSpPr>
-          <p:cNvPr id="2" name="section_39"/>
-          <p:cNvSpPr>
-            <a:spLocks noGrp="1"/>
-          </p:cNvSpPr>
-          <p:nvPr/>
-        </p:nvSpPr>
-        <p:spPr>
-          <a:xfrm>
-            <a:off x="400050" y="257175"/>
-            <a:ext cx="3048000" cy="228600"/>
-          </a:xfrm>
-          <a:prstGeom prst="rect">
-            <a:avLst/>
-          </a:prstGeom>
-          <a:noFill/>
-          <a:ln w="0">
-            <a:noFill/>
-            <a:prstDash val="solid"/>
-          </a:ln>
-        </p:spPr>
-        <p:txBody>
-          <a:bodyPr lIns="0" tIns="0" rIns="0" bIns="0" anchor="t"/>
-          <a:lstStyle/>
-          <a:p>
-            <a:pPr algn="l">
-              <a:defRPr sz="1050" b="1">
-                <a:solidFill>
-                  <a:srgbClr val="5D626C"/>
-                </a:solidFill>
-                <a:latin typeface="微软雅黑" panose="020B0503020204020204" charset="-122"/>
-                <a:ea typeface="微软雅黑" panose="020B0503020204020204" charset="-122"/>
-                <a:cs typeface="微软雅黑" panose="020B0503020204020204" charset="-122"/>
-              </a:defRPr>
-            </a:pPr>
-            <a:r>
-              <a:rPr sz="1050" b="1">
-                <a:solidFill>
-                  <a:srgbClr val="5D626C"/>
-                </a:solidFill>
-                <a:latin typeface="微软雅黑" panose="020B0503020204020204" charset="-122"/>
-                <a:ea typeface="微软雅黑" panose="020B0503020204020204" charset="-122"/>
-                <a:cs typeface="微软雅黑" panose="020B0503020204020204" charset="-122"/>
-              </a:rPr>
-              <a:t>12 · 局限与扩展</a:t>
-            </a:r>
-            <a:endParaRPr sz="1050" b="1">
-              <a:solidFill>
-                <a:srgbClr val="5D626C"/>
-              </a:solidFill>
-              <a:latin typeface="微软雅黑" panose="020B0503020204020204" charset="-122"/>
-              <a:ea typeface="微软雅黑" panose="020B0503020204020204" charset="-122"/>
-              <a:cs typeface="微软雅黑" panose="020B0503020204020204" charset="-122"/>
-            </a:endParaRPr>
-          </a:p>
-        </p:txBody>
-      </p:sp>
-      <p:sp>
-        <p:nvSpPr>
-          <p:cNvPr id="3" name="heading_39"/>
-          <p:cNvSpPr>
-            <a:spLocks noGrp="1"/>
-          </p:cNvSpPr>
-          <p:nvPr/>
-        </p:nvSpPr>
-        <p:spPr>
-          <a:xfrm>
-            <a:off x="400050" y="590550"/>
-            <a:ext cx="11287125" cy="552450"/>
-          </a:xfrm>
-          <a:prstGeom prst="rect">
-            <a:avLst/>
-          </a:prstGeom>
-          <a:noFill/>
-          <a:ln w="0">
-            <a:noFill/>
-            <a:prstDash val="solid"/>
-          </a:ln>
-        </p:spPr>
-        <p:txBody>
-          <a:bodyPr lIns="0" tIns="0" rIns="0" bIns="0" anchor="t"/>
-          <a:lstStyle/>
-          <a:p>
-            <a:pPr algn="l">
-              <a:defRPr sz="2700" b="1">
-                <a:solidFill>
-                  <a:srgbClr val="17181C"/>
-                </a:solidFill>
-                <a:latin typeface="微软雅黑" panose="020B0503020204020204" charset="-122"/>
-                <a:ea typeface="微软雅黑" panose="020B0503020204020204" charset="-122"/>
-                <a:cs typeface="微软雅黑" panose="020B0503020204020204" charset="-122"/>
-              </a:defRPr>
-            </a:pPr>
-            <a:r>
-              <a:rPr sz="2700" b="1">
-                <a:solidFill>
-                  <a:srgbClr val="17181C"/>
-                </a:solidFill>
-                <a:latin typeface="微软雅黑" panose="020B0503020204020204" charset="-122"/>
-                <a:ea typeface="微软雅黑" panose="020B0503020204020204" charset="-122"/>
-                <a:cs typeface="微软雅黑" panose="020B0503020204020204" charset="-122"/>
-              </a:rPr>
-              <a:t>当前迭代器走后序：如果要接近 std::set，应该怎样改成升序</a:t>
-            </a:r>
-            <a:endParaRPr sz="2700" b="1">
-              <a:solidFill>
-                <a:srgbClr val="17181C"/>
-              </a:solidFill>
-              <a:latin typeface="微软雅黑" panose="020B0503020204020204" charset="-122"/>
-              <a:ea typeface="微软雅黑" panose="020B0503020204020204" charset="-122"/>
-              <a:cs typeface="微软雅黑" panose="020B0503020204020204" charset="-122"/>
-            </a:endParaRPr>
-          </a:p>
-        </p:txBody>
-      </p:sp>
-      <p:sp>
-        <p:nvSpPr>
-          <p:cNvPr id="4" name="rule_39"/>
-          <p:cNvSpPr>
-            <a:spLocks noGrp="1"/>
-          </p:cNvSpPr>
-          <p:nvPr/>
-        </p:nvSpPr>
-        <p:spPr>
-          <a:xfrm>
-            <a:off x="400050" y="1352550"/>
-            <a:ext cx="11391900" cy="19050"/>
-          </a:xfrm>
-          <a:prstGeom prst="rect">
-            <a:avLst/>
-          </a:prstGeom>
-          <a:solidFill>
-            <a:srgbClr val="17181C"/>
-          </a:solidFill>
-          <a:ln w="0">
-            <a:noFill/>
-            <a:prstDash val="solid"/>
-          </a:ln>
-        </p:spPr>
-      </p:sp>
-      <p:sp>
-        <p:nvSpPr>
-          <p:cNvPr id="5" name="footer_39"/>
-          <p:cNvSpPr>
-            <a:spLocks noGrp="1"/>
-          </p:cNvSpPr>
-          <p:nvPr/>
-        </p:nvSpPr>
-        <p:spPr>
-          <a:xfrm>
-            <a:off x="11258550" y="6438900"/>
-            <a:ext cx="523875" cy="190500"/>
-          </a:xfrm>
-          <a:prstGeom prst="rect">
-            <a:avLst/>
-          </a:prstGeom>
-          <a:noFill/>
-          <a:ln w="0">
-            <a:noFill/>
-            <a:prstDash val="solid"/>
-          </a:ln>
-        </p:spPr>
-        <p:txBody>
-          <a:bodyPr lIns="0" tIns="0" rIns="0" bIns="0" anchor="t"/>
-          <a:lstStyle/>
-          <a:p>
-            <a:pPr algn="r">
-              <a:defRPr sz="900" b="0">
-                <a:solidFill>
-                  <a:srgbClr val="5D626C"/>
-                </a:solidFill>
-                <a:latin typeface="微软雅黑" panose="020B0503020204020204" charset="-122"/>
-                <a:ea typeface="微软雅黑" panose="020B0503020204020204" charset="-122"/>
-                <a:cs typeface="微软雅黑" panose="020B0503020204020204" charset="-122"/>
-              </a:defRPr>
-            </a:pPr>
-            <a:r>
-              <a:rPr sz="900" b="0">
-                <a:solidFill>
-                  <a:srgbClr val="5D626C"/>
-                </a:solidFill>
-                <a:latin typeface="微软雅黑" panose="020B0503020204020204" charset="-122"/>
-                <a:ea typeface="微软雅黑" panose="020B0503020204020204" charset="-122"/>
-                <a:cs typeface="微软雅黑" panose="020B0503020204020204" charset="-122"/>
-              </a:rPr>
-              <a:t>39</a:t>
-            </a:r>
-            <a:endParaRPr sz="900" b="0">
-              <a:solidFill>
-                <a:srgbClr val="5D626C"/>
-              </a:solidFill>
-              <a:latin typeface="微软雅黑" panose="020B0503020204020204" charset="-122"/>
-              <a:ea typeface="微软雅黑" panose="020B0503020204020204" charset="-122"/>
-              <a:cs typeface="微软雅黑" panose="020B0503020204020204" charset="-122"/>
-            </a:endParaRPr>
-          </a:p>
-        </p:txBody>
-      </p:sp>
-      <p:sp>
-        <p:nvSpPr>
-          <p:cNvPr id="6" name="question_39_42"/>
-          <p:cNvSpPr>
-            <a:spLocks noGrp="1"/>
-          </p:cNvSpPr>
-          <p:nvPr/>
-        </p:nvSpPr>
-        <p:spPr>
-          <a:xfrm>
-            <a:off x="400050" y="1695450"/>
-            <a:ext cx="5905500" cy="533400"/>
-          </a:xfrm>
-          <a:prstGeom prst="rect">
-            <a:avLst/>
-          </a:prstGeom>
-          <a:noFill/>
-          <a:ln w="0">
-            <a:noFill/>
-            <a:prstDash val="solid"/>
-          </a:ln>
-        </p:spPr>
-        <p:txBody>
-          <a:bodyPr lIns="0" tIns="0" rIns="0" bIns="0" anchor="t"/>
-          <a:lstStyle/>
-          <a:p>
-            <a:pPr algn="l">
-              <a:defRPr sz="1800" b="1">
-                <a:solidFill>
-                  <a:srgbClr val="DE3840"/>
-                </a:solidFill>
-                <a:latin typeface="微软雅黑" panose="020B0503020204020204" charset="-122"/>
-                <a:ea typeface="微软雅黑" panose="020B0503020204020204" charset="-122"/>
-                <a:cs typeface="微软雅黑" panose="020B0503020204020204" charset="-122"/>
-              </a:defRPr>
-            </a:pPr>
-            <a:r>
-              <a:rPr sz="1800" b="1">
-                <a:solidFill>
-                  <a:srgbClr val="DE3840"/>
-                </a:solidFill>
-                <a:latin typeface="微软雅黑" panose="020B0503020204020204" charset="-122"/>
-                <a:ea typeface="微软雅黑" panose="020B0503020204020204" charset="-122"/>
-                <a:cs typeface="微软雅黑" panose="020B0503020204020204" charset="-122"/>
-              </a:rPr>
-              <a:t>中序 successor 不是简单地把 begin 改成最左节点</a:t>
-            </a:r>
-            <a:endParaRPr sz="1800" b="1">
-              <a:solidFill>
-                <a:srgbClr val="DE3840"/>
-              </a:solidFill>
-              <a:latin typeface="微软雅黑" panose="020B0503020204020204" charset="-122"/>
-              <a:ea typeface="微软雅黑" panose="020B0503020204020204" charset="-122"/>
-              <a:cs typeface="微软雅黑" panose="020B0503020204020204" charset="-122"/>
-            </a:endParaRPr>
-          </a:p>
-        </p:txBody>
-      </p:sp>
-      <p:sp>
-        <p:nvSpPr>
-          <p:cNvPr id="7" name="reason_bar_39_42"/>
-          <p:cNvSpPr>
-            <a:spLocks noGrp="1"/>
-          </p:cNvSpPr>
-          <p:nvPr/>
-        </p:nvSpPr>
-        <p:spPr>
-          <a:xfrm>
-            <a:off x="400050" y="2305050"/>
-            <a:ext cx="66675" cy="3629025"/>
-          </a:xfrm>
-          <a:prstGeom prst="rect">
-            <a:avLst/>
-          </a:prstGeom>
-          <a:solidFill>
-            <a:srgbClr val="DE3840"/>
-          </a:solidFill>
-          <a:ln w="0">
-            <a:noFill/>
-            <a:prstDash val="solid"/>
-          </a:ln>
-        </p:spPr>
-      </p:sp>
-      <p:sp>
-        <p:nvSpPr>
-          <p:cNvPr id="8" name="reason_body_39_42"/>
-          <p:cNvSpPr>
-            <a:spLocks noGrp="1"/>
-          </p:cNvSpPr>
-          <p:nvPr/>
-        </p:nvSpPr>
-        <p:spPr>
-          <a:xfrm>
-            <a:off x="628650" y="2419350"/>
-            <a:ext cx="5619750" cy="3476625"/>
-          </a:xfrm>
-          <a:prstGeom prst="rect">
-            <a:avLst/>
-          </a:prstGeom>
-          <a:noFill/>
-          <a:ln w="0">
-            <a:noFill/>
-            <a:prstDash val="solid"/>
-          </a:ln>
-        </p:spPr>
-        <p:txBody>
-          <a:bodyPr lIns="0" tIns="0" rIns="0" bIns="0" anchor="t"/>
-          <a:lstStyle/>
-          <a:p>
-            <a:pPr algn="l">
-              <a:defRPr sz="1350" b="0">
-                <a:solidFill>
-                  <a:srgbClr val="5D626C"/>
-                </a:solidFill>
-                <a:latin typeface="微软雅黑" panose="020B0503020204020204" charset="-122"/>
-                <a:ea typeface="微软雅黑" panose="020B0503020204020204" charset="-122"/>
-                <a:cs typeface="微软雅黑" panose="020B0503020204020204" charset="-122"/>
-              </a:defRPr>
-            </a:pPr>
-            <a:r>
-              <a:rPr sz="1350" b="0">
-                <a:solidFill>
-                  <a:srgbClr val="5D626C"/>
-                </a:solidFill>
-                <a:latin typeface="微软雅黑" panose="020B0503020204020204" charset="-122"/>
-                <a:ea typeface="微软雅黑" panose="020B0503020204020204" charset="-122"/>
-                <a:cs typeface="微软雅黑" panose="020B0503020204020204" charset="-122"/>
-              </a:rPr>
-              <a:t>begin 的确应该从 root 一路向 left，找到最小 key。但 operator++ 也必须一起更换规则。</a:t>
-            </a:r>
-            <a:endParaRPr sz="1350" b="0">
-              <a:solidFill>
-                <a:srgbClr val="5D626C"/>
-              </a:solidFill>
-              <a:latin typeface="微软雅黑" panose="020B0503020204020204" charset="-122"/>
-              <a:ea typeface="微软雅黑" panose="020B0503020204020204" charset="-122"/>
-              <a:cs typeface="微软雅黑" panose="020B0503020204020204" charset="-122"/>
-            </a:endParaRPr>
-          </a:p>
-          <a:p>
-            <a:endParaRPr sz="1350"/>
-          </a:p>
-          <a:p>
-            <a:pPr algn="l">
-              <a:defRPr sz="1350" b="0">
-                <a:solidFill>
-                  <a:srgbClr val="5D626C"/>
-                </a:solidFill>
-                <a:latin typeface="微软雅黑" panose="020B0503020204020204" charset="-122"/>
-                <a:ea typeface="微软雅黑" panose="020B0503020204020204" charset="-122"/>
-                <a:cs typeface="微软雅黑" panose="020B0503020204020204" charset="-122"/>
-              </a:defRPr>
-            </a:pPr>
-            <a:r>
-              <a:rPr sz="1350" b="0">
-                <a:solidFill>
-                  <a:srgbClr val="5D626C"/>
-                </a:solidFill>
-                <a:latin typeface="微软雅黑" panose="020B0503020204020204" charset="-122"/>
-                <a:ea typeface="微软雅黑" panose="020B0503020204020204" charset="-122"/>
-                <a:cs typeface="微软雅黑" panose="020B0503020204020204" charset="-122"/>
-              </a:rPr>
-              <a:t>当前节点有 right 时，下一个值是右子树中最靠左的节点；当前节点没有 right 时，就沿 parent 向上走，直到找到第一个“当前节点位于其左子树”的祖先，这个祖先才是下一个更大的 key。</a:t>
-            </a:r>
-            <a:endParaRPr sz="1350" b="0">
-              <a:solidFill>
-                <a:srgbClr val="5D626C"/>
-              </a:solidFill>
-              <a:latin typeface="微软雅黑" panose="020B0503020204020204" charset="-122"/>
-              <a:ea typeface="微软雅黑" panose="020B0503020204020204" charset="-122"/>
-              <a:cs typeface="微软雅黑" panose="020B0503020204020204" charset="-122"/>
-            </a:endParaRPr>
-          </a:p>
-          <a:p>
-            <a:endParaRPr sz="1350"/>
-          </a:p>
-          <a:p>
-            <a:pPr algn="l">
-              <a:defRPr sz="1350" b="0">
-                <a:solidFill>
-                  <a:srgbClr val="5D626C"/>
-                </a:solidFill>
-                <a:latin typeface="微软雅黑" panose="020B0503020204020204" charset="-122"/>
-                <a:ea typeface="微软雅黑" panose="020B0503020204020204" charset="-122"/>
-                <a:cs typeface="微软雅黑" panose="020B0503020204020204" charset="-122"/>
-              </a:defRPr>
-            </a:pPr>
-            <a:r>
-              <a:rPr sz="1350" b="0">
-                <a:solidFill>
-                  <a:srgbClr val="5D626C"/>
-                </a:solidFill>
-                <a:latin typeface="微软雅黑" panose="020B0503020204020204" charset="-122"/>
-                <a:ea typeface="微软雅黑" panose="020B0503020204020204" charset="-122"/>
-                <a:cs typeface="微软雅黑" panose="020B0503020204020204" charset="-122"/>
-              </a:rPr>
-              <a:t>如果一路走到 NULL，说明当前节点已经是最大值，迭代器进入 end。</a:t>
-            </a:r>
-            <a:endParaRPr sz="1350" b="0">
-              <a:solidFill>
-                <a:srgbClr val="5D626C"/>
-              </a:solidFill>
-              <a:latin typeface="微软雅黑" panose="020B0503020204020204" charset="-122"/>
-              <a:ea typeface="微软雅黑" panose="020B0503020204020204" charset="-122"/>
-              <a:cs typeface="微软雅黑" panose="020B0503020204020204" charset="-122"/>
-            </a:endParaRPr>
-          </a:p>
-          <a:p>
-            <a:endParaRPr sz="1350"/>
-          </a:p>
-          <a:p>
-            <a:pPr algn="l">
-              <a:defRPr sz="1350" b="0">
-                <a:solidFill>
-                  <a:srgbClr val="5D626C"/>
-                </a:solidFill>
-                <a:latin typeface="微软雅黑" panose="020B0503020204020204" charset="-122"/>
-                <a:ea typeface="微软雅黑" panose="020B0503020204020204" charset="-122"/>
-                <a:cs typeface="微软雅黑" panose="020B0503020204020204" charset="-122"/>
-              </a:defRPr>
-            </a:pPr>
-            <a:r>
-              <a:rPr sz="1350" b="0">
-                <a:solidFill>
-                  <a:srgbClr val="5D626C"/>
-                </a:solidFill>
-                <a:latin typeface="微软雅黑" panose="020B0503020204020204" charset="-122"/>
-                <a:ea typeface="微软雅黑" panose="020B0503020204020204" charset="-122"/>
-                <a:cs typeface="微软雅黑" panose="020B0503020204020204" charset="-122"/>
-              </a:rPr>
-              <a:t>这套规则与后序遍历完全不同，因此不能只改测试期待值，必须把 begin 与 operator++ 当作一组协议一起重写。</a:t>
-            </a:r>
-            <a:endParaRPr sz="1350" b="0">
-              <a:solidFill>
-                <a:srgbClr val="5D626C"/>
-              </a:solidFill>
-              <a:latin typeface="微软雅黑" panose="020B0503020204020204" charset="-122"/>
-              <a:ea typeface="微软雅黑" panose="020B0503020204020204" charset="-122"/>
-              <a:cs typeface="微软雅黑" panose="020B0503020204020204" charset="-122"/>
-            </a:endParaRPr>
-          </a:p>
-        </p:txBody>
-      </p:sp>
-      <p:sp>
-        <p:nvSpPr>
-          <p:cNvPr id="9" name="successor_tree_edge_a_b"/>
-          <p:cNvSpPr>
-            <a:spLocks noGrp="1"/>
-          </p:cNvSpPr>
-          <p:nvPr/>
-        </p:nvSpPr>
-        <p:spPr>
-          <a:xfrm rot="7776641">
-            <a:off x="7390375" y="2962275"/>
-            <a:ext cx="1792751" cy="28575"/>
-          </a:xfrm>
-          <a:prstGeom prst="rect">
-            <a:avLst/>
-          </a:prstGeom>
-          <a:solidFill>
-            <a:srgbClr val="B9BDC5"/>
-          </a:solidFill>
-          <a:ln w="0">
-            <a:noFill/>
-            <a:prstDash val="solid"/>
-          </a:ln>
-        </p:spPr>
-      </p:sp>
-      <p:sp>
-        <p:nvSpPr>
-          <p:cNvPr id="10" name="successor_tree_edge_a_d"/>
-          <p:cNvSpPr>
-            <a:spLocks noGrp="1"/>
-          </p:cNvSpPr>
-          <p:nvPr/>
-        </p:nvSpPr>
-        <p:spPr>
-          <a:xfrm rot="3023359">
-            <a:off x="8533375" y="2962275"/>
-            <a:ext cx="1792751" cy="28575"/>
-          </a:xfrm>
-          <a:prstGeom prst="rect">
-            <a:avLst/>
-          </a:prstGeom>
-          <a:solidFill>
-            <a:srgbClr val="B9BDC5"/>
-          </a:solidFill>
-          <a:ln w="0">
-            <a:noFill/>
-            <a:prstDash val="solid"/>
-          </a:ln>
-        </p:spPr>
-      </p:sp>
-      <p:sp>
-        <p:nvSpPr>
-          <p:cNvPr id="11" name="successor_tree_edge_d_e"/>
-          <p:cNvSpPr>
-            <a:spLocks noGrp="1"/>
-          </p:cNvSpPr>
-          <p:nvPr/>
-        </p:nvSpPr>
-        <p:spPr>
-          <a:xfrm rot="6748766">
-            <a:off x="8968152" y="4343400"/>
-            <a:ext cx="1494697" cy="28575"/>
-          </a:xfrm>
-          <a:prstGeom prst="rect">
-            <a:avLst/>
-          </a:prstGeom>
-          <a:solidFill>
-            <a:srgbClr val="B9BDC5"/>
-          </a:solidFill>
-          <a:ln w="0">
-            <a:noFill/>
-            <a:prstDash val="solid"/>
-          </a:ln>
-        </p:spPr>
-      </p:sp>
-      <p:sp>
-        <p:nvSpPr>
-          <p:cNvPr id="12" name="successor_tree_edge_d_f"/>
-          <p:cNvSpPr>
-            <a:spLocks noGrp="1"/>
-          </p:cNvSpPr>
-          <p:nvPr/>
-        </p:nvSpPr>
-        <p:spPr>
-          <a:xfrm rot="4051234">
-            <a:off x="9539652" y="4343400"/>
-            <a:ext cx="1494697" cy="28575"/>
-          </a:xfrm>
-          <a:prstGeom prst="rect">
-            <a:avLst/>
-          </a:prstGeom>
-          <a:solidFill>
-            <a:srgbClr val="B9BDC5"/>
-          </a:solidFill>
-          <a:ln w="0">
-            <a:noFill/>
-            <a:prstDash val="solid"/>
-          </a:ln>
-        </p:spPr>
-      </p:sp>
-      <p:sp>
-        <p:nvSpPr>
-          <p:cNvPr id="13" name="successor_tree_a"/>
-          <p:cNvSpPr>
-            <a:spLocks noGrp="1"/>
-          </p:cNvSpPr>
-          <p:nvPr/>
-        </p:nvSpPr>
-        <p:spPr>
-          <a:xfrm>
-            <a:off x="8620125" y="2047875"/>
-            <a:ext cx="476250" cy="476250"/>
-          </a:xfrm>
-          <a:prstGeom prst="ellipse">
-            <a:avLst/>
-          </a:prstGeom>
-          <a:solidFill>
-            <a:srgbClr val="22242A"/>
-          </a:solidFill>
-          <a:ln w="9525">
-            <a:solidFill>
-              <a:srgbClr val="FFFFFF"/>
-            </a:solidFill>
-            <a:prstDash val="solid"/>
-          </a:ln>
-        </p:spPr>
-      </p:sp>
-      <p:sp>
-        <p:nvSpPr>
-          <p:cNvPr id="14" name="successor_tree_a_label"/>
-          <p:cNvSpPr>
-            <a:spLocks noGrp="1"/>
-          </p:cNvSpPr>
-          <p:nvPr/>
-        </p:nvSpPr>
-        <p:spPr>
-          <a:xfrm>
-            <a:off x="8658225" y="2162175"/>
-            <a:ext cx="400050" cy="247650"/>
-          </a:xfrm>
-          <a:prstGeom prst="rect">
-            <a:avLst/>
-          </a:prstGeom>
-          <a:noFill/>
-          <a:ln w="0">
-            <a:noFill/>
-            <a:prstDash val="solid"/>
-          </a:ln>
-        </p:spPr>
-        <p:txBody>
-          <a:bodyPr lIns="0" tIns="0" rIns="0" bIns="0" anchor="t"/>
-          <a:lstStyle/>
-          <a:p>
-            <a:pPr algn="ctr">
-              <a:defRPr sz="1200" b="1">
-                <a:solidFill>
-                  <a:srgbClr val="FFFFFF"/>
-                </a:solidFill>
-                <a:latin typeface="微软雅黑" panose="020B0503020204020204" charset="-122"/>
-                <a:ea typeface="微软雅黑" panose="020B0503020204020204" charset="-122"/>
-                <a:cs typeface="微软雅黑" panose="020B0503020204020204" charset="-122"/>
-              </a:defRPr>
-            </a:pPr>
-            <a:r>
-              <a:rPr sz="1200" b="1">
-                <a:solidFill>
-                  <a:srgbClr val="FFFFFF"/>
-                </a:solidFill>
-                <a:latin typeface="微软雅黑" panose="020B0503020204020204" charset="-122"/>
-                <a:ea typeface="微软雅黑" panose="020B0503020204020204" charset="-122"/>
-                <a:cs typeface="微软雅黑" panose="020B0503020204020204" charset="-122"/>
-              </a:rPr>
-              <a:t>10</a:t>
-            </a:r>
-            <a:endParaRPr sz="1200" b="1">
-              <a:solidFill>
-                <a:srgbClr val="FFFFFF"/>
-              </a:solidFill>
-              <a:latin typeface="微软雅黑" panose="020B0503020204020204" charset="-122"/>
-              <a:ea typeface="微软雅黑" panose="020B0503020204020204" charset="-122"/>
-              <a:cs typeface="微软雅黑" panose="020B0503020204020204" charset="-122"/>
-            </a:endParaRPr>
-          </a:p>
-        </p:txBody>
-      </p:sp>
-      <p:sp>
-        <p:nvSpPr>
-          <p:cNvPr id="15" name="successor_tree_b"/>
-          <p:cNvSpPr>
-            <a:spLocks noGrp="1"/>
-          </p:cNvSpPr>
-          <p:nvPr/>
-        </p:nvSpPr>
-        <p:spPr>
-          <a:xfrm>
-            <a:off x="7477125" y="3429000"/>
-            <a:ext cx="476250" cy="476250"/>
-          </a:xfrm>
-          <a:prstGeom prst="ellipse">
-            <a:avLst/>
-          </a:prstGeom>
-          <a:solidFill>
-            <a:srgbClr val="DE3840"/>
-          </a:solidFill>
-          <a:ln w="9525">
-            <a:solidFill>
-              <a:srgbClr val="FFFFFF"/>
-            </a:solidFill>
-            <a:prstDash val="solid"/>
-          </a:ln>
-        </p:spPr>
-      </p:sp>
-      <p:sp>
-        <p:nvSpPr>
-          <p:cNvPr id="16" name="successor_tree_b_label"/>
-          <p:cNvSpPr>
-            <a:spLocks noGrp="1"/>
-          </p:cNvSpPr>
-          <p:nvPr/>
-        </p:nvSpPr>
-        <p:spPr>
-          <a:xfrm>
-            <a:off x="7515225" y="3543300"/>
-            <a:ext cx="400050" cy="247650"/>
-          </a:xfrm>
-          <a:prstGeom prst="rect">
-            <a:avLst/>
-          </a:prstGeom>
-          <a:noFill/>
-          <a:ln w="0">
-            <a:noFill/>
-            <a:prstDash val="solid"/>
-          </a:ln>
-        </p:spPr>
-        <p:txBody>
-          <a:bodyPr lIns="0" tIns="0" rIns="0" bIns="0" anchor="t"/>
-          <a:lstStyle/>
-          <a:p>
-            <a:pPr algn="ctr">
-              <a:defRPr sz="1200" b="1">
-                <a:solidFill>
-                  <a:srgbClr val="FFFFFF"/>
-                </a:solidFill>
-                <a:latin typeface="微软雅黑" panose="020B0503020204020204" charset="-122"/>
-                <a:ea typeface="微软雅黑" panose="020B0503020204020204" charset="-122"/>
-                <a:cs typeface="微软雅黑" panose="020B0503020204020204" charset="-122"/>
-              </a:defRPr>
-            </a:pPr>
-            <a:r>
-              <a:rPr sz="1200" b="1">
-                <a:solidFill>
-                  <a:srgbClr val="FFFFFF"/>
-                </a:solidFill>
-                <a:latin typeface="微软雅黑" panose="020B0503020204020204" charset="-122"/>
-                <a:ea typeface="微软雅黑" panose="020B0503020204020204" charset="-122"/>
-                <a:cs typeface="微软雅黑" panose="020B0503020204020204" charset="-122"/>
-              </a:rPr>
-              <a:t>5</a:t>
-            </a:r>
-            <a:endParaRPr sz="1200" b="1">
-              <a:solidFill>
-                <a:srgbClr val="FFFFFF"/>
-              </a:solidFill>
-              <a:latin typeface="微软雅黑" panose="020B0503020204020204" charset="-122"/>
-              <a:ea typeface="微软雅黑" panose="020B0503020204020204" charset="-122"/>
-              <a:cs typeface="微软雅黑" panose="020B0503020204020204" charset="-122"/>
-            </a:endParaRPr>
-          </a:p>
-        </p:txBody>
-      </p:sp>
-      <p:sp>
-        <p:nvSpPr>
-          <p:cNvPr id="17" name="successor_tree_d"/>
-          <p:cNvSpPr>
-            <a:spLocks noGrp="1"/>
-          </p:cNvSpPr>
-          <p:nvPr/>
-        </p:nvSpPr>
-        <p:spPr>
-          <a:xfrm>
-            <a:off x="9763125" y="3429000"/>
-            <a:ext cx="476250" cy="476250"/>
-          </a:xfrm>
-          <a:prstGeom prst="ellipse">
-            <a:avLst/>
-          </a:prstGeom>
-          <a:solidFill>
-            <a:srgbClr val="DE3840"/>
-          </a:solidFill>
-          <a:ln w="9525">
-            <a:solidFill>
-              <a:srgbClr val="FFFFFF"/>
-            </a:solidFill>
-            <a:prstDash val="solid"/>
-          </a:ln>
-        </p:spPr>
-      </p:sp>
-      <p:sp>
-        <p:nvSpPr>
-          <p:cNvPr id="18" name="successor_tree_d_label"/>
-          <p:cNvSpPr>
-            <a:spLocks noGrp="1"/>
-          </p:cNvSpPr>
-          <p:nvPr/>
-        </p:nvSpPr>
-        <p:spPr>
-          <a:xfrm>
-            <a:off x="9801225" y="3543300"/>
-            <a:ext cx="400050" cy="247650"/>
-          </a:xfrm>
-          <a:prstGeom prst="rect">
-            <a:avLst/>
-          </a:prstGeom>
-          <a:noFill/>
-          <a:ln w="0">
-            <a:noFill/>
-            <a:prstDash val="solid"/>
-          </a:ln>
-        </p:spPr>
-        <p:txBody>
-          <a:bodyPr lIns="0" tIns="0" rIns="0" bIns="0" anchor="t"/>
-          <a:lstStyle/>
-          <a:p>
-            <a:pPr algn="ctr">
-              <a:defRPr sz="1200" b="1">
-                <a:solidFill>
-                  <a:srgbClr val="FFFFFF"/>
-                </a:solidFill>
-                <a:latin typeface="微软雅黑" panose="020B0503020204020204" charset="-122"/>
-                <a:ea typeface="微软雅黑" panose="020B0503020204020204" charset="-122"/>
-                <a:cs typeface="微软雅黑" panose="020B0503020204020204" charset="-122"/>
-              </a:defRPr>
-            </a:pPr>
-            <a:r>
-              <a:rPr sz="1200" b="1">
-                <a:solidFill>
-                  <a:srgbClr val="FFFFFF"/>
-                </a:solidFill>
-                <a:latin typeface="微软雅黑" panose="020B0503020204020204" charset="-122"/>
-                <a:ea typeface="微软雅黑" panose="020B0503020204020204" charset="-122"/>
-                <a:cs typeface="微软雅黑" panose="020B0503020204020204" charset="-122"/>
-              </a:rPr>
-              <a:t>15</a:t>
-            </a:r>
-            <a:endParaRPr sz="1200" b="1">
-              <a:solidFill>
-                <a:srgbClr val="FFFFFF"/>
-              </a:solidFill>
-              <a:latin typeface="微软雅黑" panose="020B0503020204020204" charset="-122"/>
-              <a:ea typeface="微软雅黑" panose="020B0503020204020204" charset="-122"/>
-              <a:cs typeface="微软雅黑" panose="020B0503020204020204" charset="-122"/>
-            </a:endParaRPr>
-          </a:p>
-        </p:txBody>
-      </p:sp>
-      <p:sp>
-        <p:nvSpPr>
-          <p:cNvPr id="19" name="successor_tree_e"/>
-          <p:cNvSpPr>
-            <a:spLocks noGrp="1"/>
-          </p:cNvSpPr>
-          <p:nvPr/>
-        </p:nvSpPr>
-        <p:spPr>
-          <a:xfrm>
-            <a:off x="9191625" y="4810125"/>
-            <a:ext cx="476250" cy="476250"/>
-          </a:xfrm>
-          <a:prstGeom prst="ellipse">
-            <a:avLst/>
-          </a:prstGeom>
-          <a:solidFill>
-            <a:srgbClr val="22242A"/>
-          </a:solidFill>
-          <a:ln w="9525">
-            <a:solidFill>
-              <a:srgbClr val="FFFFFF"/>
-            </a:solidFill>
-            <a:prstDash val="solid"/>
-          </a:ln>
-        </p:spPr>
-      </p:sp>
-      <p:sp>
-        <p:nvSpPr>
-          <p:cNvPr id="20" name="successor_tree_e_label"/>
-          <p:cNvSpPr>
-            <a:spLocks noGrp="1"/>
-          </p:cNvSpPr>
-          <p:nvPr/>
-        </p:nvSpPr>
-        <p:spPr>
-          <a:xfrm>
-            <a:off x="9229725" y="4924425"/>
-            <a:ext cx="400050" cy="247650"/>
-          </a:xfrm>
-          <a:prstGeom prst="rect">
-            <a:avLst/>
-          </a:prstGeom>
-          <a:noFill/>
-          <a:ln w="0">
-            <a:noFill/>
-            <a:prstDash val="solid"/>
-          </a:ln>
-        </p:spPr>
-        <p:txBody>
-          <a:bodyPr lIns="0" tIns="0" rIns="0" bIns="0" anchor="t"/>
-          <a:lstStyle/>
-          <a:p>
-            <a:pPr algn="ctr">
-              <a:defRPr sz="1200" b="1">
-                <a:solidFill>
-                  <a:srgbClr val="FFFFFF"/>
-                </a:solidFill>
-                <a:latin typeface="微软雅黑" panose="020B0503020204020204" charset="-122"/>
-                <a:ea typeface="微软雅黑" panose="020B0503020204020204" charset="-122"/>
-                <a:cs typeface="微软雅黑" panose="020B0503020204020204" charset="-122"/>
-              </a:defRPr>
-            </a:pPr>
-            <a:r>
-              <a:rPr sz="1200" b="1">
-                <a:solidFill>
-                  <a:srgbClr val="FFFFFF"/>
-                </a:solidFill>
-                <a:latin typeface="微软雅黑" panose="020B0503020204020204" charset="-122"/>
-                <a:ea typeface="微软雅黑" panose="020B0503020204020204" charset="-122"/>
-                <a:cs typeface="微软雅黑" panose="020B0503020204020204" charset="-122"/>
-              </a:rPr>
-              <a:t>12</a:t>
-            </a:r>
-            <a:endParaRPr sz="1200" b="1">
-              <a:solidFill>
-                <a:srgbClr val="FFFFFF"/>
-              </a:solidFill>
-              <a:latin typeface="微软雅黑" panose="020B0503020204020204" charset="-122"/>
-              <a:ea typeface="微软雅黑" panose="020B0503020204020204" charset="-122"/>
-              <a:cs typeface="微软雅黑" panose="020B0503020204020204" charset="-122"/>
-            </a:endParaRPr>
-          </a:p>
-        </p:txBody>
-      </p:sp>
-      <p:sp>
-        <p:nvSpPr>
-          <p:cNvPr id="21" name="successor_tree_f"/>
-          <p:cNvSpPr>
-            <a:spLocks noGrp="1"/>
-          </p:cNvSpPr>
-          <p:nvPr/>
-        </p:nvSpPr>
-        <p:spPr>
-          <a:xfrm>
-            <a:off x="10334625" y="4810125"/>
-            <a:ext cx="476250" cy="476250"/>
-          </a:xfrm>
-          <a:prstGeom prst="ellipse">
-            <a:avLst/>
-          </a:prstGeom>
-          <a:solidFill>
-            <a:srgbClr val="22242A"/>
-          </a:solidFill>
-          <a:ln w="9525">
-            <a:solidFill>
-              <a:srgbClr val="FFFFFF"/>
-            </a:solidFill>
-            <a:prstDash val="solid"/>
-          </a:ln>
-        </p:spPr>
-      </p:sp>
-      <p:sp>
-        <p:nvSpPr>
-          <p:cNvPr id="22" name="successor_tree_f_label"/>
-          <p:cNvSpPr>
-            <a:spLocks noGrp="1"/>
-          </p:cNvSpPr>
-          <p:nvPr/>
-        </p:nvSpPr>
-        <p:spPr>
-          <a:xfrm>
-            <a:off x="10372725" y="4924425"/>
-            <a:ext cx="400050" cy="247650"/>
-          </a:xfrm>
-          <a:prstGeom prst="rect">
-            <a:avLst/>
-          </a:prstGeom>
-          <a:noFill/>
-          <a:ln w="0">
-            <a:noFill/>
-            <a:prstDash val="solid"/>
-          </a:ln>
-        </p:spPr>
-        <p:txBody>
-          <a:bodyPr lIns="0" tIns="0" rIns="0" bIns="0" anchor="t"/>
-          <a:lstStyle/>
-          <a:p>
-            <a:pPr algn="ctr">
-              <a:defRPr sz="1200" b="1">
-                <a:solidFill>
-                  <a:srgbClr val="FFFFFF"/>
-                </a:solidFill>
-                <a:latin typeface="微软雅黑" panose="020B0503020204020204" charset="-122"/>
-                <a:ea typeface="微软雅黑" panose="020B0503020204020204" charset="-122"/>
-                <a:cs typeface="微软雅黑" panose="020B0503020204020204" charset="-122"/>
-              </a:defRPr>
-            </a:pPr>
-            <a:r>
-              <a:rPr sz="1200" b="1">
-                <a:solidFill>
-                  <a:srgbClr val="FFFFFF"/>
-                </a:solidFill>
-                <a:latin typeface="微软雅黑" panose="020B0503020204020204" charset="-122"/>
-                <a:ea typeface="微软雅黑" panose="020B0503020204020204" charset="-122"/>
-                <a:cs typeface="微软雅黑" panose="020B0503020204020204" charset="-122"/>
-              </a:rPr>
-              <a:t>18</a:t>
-            </a:r>
-            <a:endParaRPr sz="1200" b="1">
-              <a:solidFill>
-                <a:srgbClr val="FFFFFF"/>
-              </a:solidFill>
-              <a:latin typeface="微软雅黑" panose="020B0503020204020204" charset="-122"/>
-              <a:ea typeface="微软雅黑" panose="020B0503020204020204" charset="-122"/>
-              <a:cs typeface="微软雅黑" panose="020B0503020204020204" charset="-122"/>
-            </a:endParaRPr>
-          </a:p>
-        </p:txBody>
-      </p:sp>
-      <p:sp>
-        <p:nvSpPr>
-          <p:cNvPr id="23" name="successor_note"/>
-          <p:cNvSpPr>
-            <a:spLocks noGrp="1"/>
-          </p:cNvSpPr>
-          <p:nvPr/>
-        </p:nvSpPr>
-        <p:spPr>
-          <a:xfrm>
-            <a:off x="7048500" y="5619750"/>
-            <a:ext cx="4476750" cy="333375"/>
-          </a:xfrm>
-          <a:prstGeom prst="rect">
-            <a:avLst/>
-          </a:prstGeom>
-          <a:noFill/>
-          <a:ln w="0">
-            <a:noFill/>
-            <a:prstDash val="solid"/>
-          </a:ln>
-        </p:spPr>
-        <p:txBody>
-          <a:bodyPr lIns="0" tIns="0" rIns="0" bIns="0" anchor="t"/>
-          <a:lstStyle/>
-          <a:p>
-            <a:pPr algn="ctr">
-              <a:defRPr sz="1350" b="1">
-                <a:solidFill>
-                  <a:srgbClr val="486A9A"/>
-                </a:solidFill>
-                <a:latin typeface="微软雅黑" panose="020B0503020204020204" charset="-122"/>
-                <a:ea typeface="微软雅黑" panose="020B0503020204020204" charset="-122"/>
-                <a:cs typeface="微软雅黑" panose="020B0503020204020204" charset="-122"/>
-              </a:defRPr>
-            </a:pPr>
-            <a:r>
-              <a:rPr sz="1350" b="1">
-                <a:solidFill>
-                  <a:srgbClr val="486A9A"/>
-                </a:solidFill>
-                <a:latin typeface="微软雅黑" panose="020B0503020204020204" charset="-122"/>
-                <a:ea typeface="微软雅黑" panose="020B0503020204020204" charset="-122"/>
-                <a:cs typeface="微软雅黑" panose="020B0503020204020204" charset="-122"/>
-              </a:rPr>
-              <a:t>10 的 successor：进入右子树 15，再一路向左得到 12</a:t>
-            </a:r>
-            <a:endParaRPr sz="1350" b="1">
-              <a:solidFill>
-                <a:srgbClr val="486A9A"/>
               </a:solidFill>
               <a:latin typeface="微软雅黑" panose="020B0503020204020204" charset="-122"/>
               <a:ea typeface="微软雅黑" panose="020B0503020204020204" charset="-122"/>
@@ -42866,562 +40986,6 @@
               <a:t>RBTreeNode 被放在 RBTree 内部并设为 private。外部真正需要的是“插入一个值”，不是随便写 node-&gt;left 或 node-&gt;color。</a:t>
             </a:r>
             <a:endParaRPr sz="1350" b="0">
-              <a:solidFill>
-                <a:srgbClr val="5D626C"/>
-              </a:solidFill>
-              <a:latin typeface="微软雅黑" panose="020B0503020204020204" charset="-122"/>
-              <a:ea typeface="微软雅黑" panose="020B0503020204020204" charset="-122"/>
-              <a:cs typeface="微软雅黑" panose="020B0503020204020204" charset="-122"/>
-            </a:endParaRPr>
-          </a:p>
-        </p:txBody>
-      </p:sp>
-    </p:spTree>
-  </p:cSld>
-  <p:clrMapOvr>
-    <a:masterClrMapping/>
-  </p:clrMapOvr>
-</p:sld>
-</file>
-
-<file path=ppt/slides/slide40.xml><?xml version="1.0" encoding="utf-8"?>
-<p:sld xmlns:a="http://schemas.openxmlformats.org/drawingml/2006/main" xmlns:r="http://schemas.openxmlformats.org/officeDocument/2006/relationships" xmlns:p="http://schemas.openxmlformats.org/presentationml/2006/main">
-  <p:cSld>
-    <p:bg>
-      <p:bgPr>
-        <a:solidFill>
-          <a:srgbClr val="FFFFFF"/>
-        </a:solidFill>
-        <a:effectLst/>
-      </p:bgPr>
-    </p:bg>
-    <p:spTree>
-      <p:nvGrpSpPr>
-        <p:cNvPr id="1" name=""/>
-        <p:cNvGrpSpPr/>
-        <p:nvPr/>
-      </p:nvGrpSpPr>
-      <p:grpSpPr/>
-      <p:sp>
-        <p:nvSpPr>
-          <p:cNvPr id="2" name="end_section"/>
-          <p:cNvSpPr>
-            <a:spLocks noGrp="1"/>
-          </p:cNvSpPr>
-          <p:nvPr/>
-        </p:nvSpPr>
-        <p:spPr>
-          <a:xfrm>
-            <a:off x="400050" y="381000"/>
-            <a:ext cx="2476500" cy="228600"/>
-          </a:xfrm>
-          <a:prstGeom prst="rect">
-            <a:avLst/>
-          </a:prstGeom>
-          <a:noFill/>
-          <a:ln w="0">
-            <a:noFill/>
-            <a:prstDash val="solid"/>
-          </a:ln>
-        </p:spPr>
-        <p:txBody>
-          <a:bodyPr lIns="0" tIns="0" rIns="0" bIns="0" anchor="t"/>
-          <a:lstStyle/>
-          <a:p>
-            <a:pPr algn="l">
-              <a:defRPr sz="1050" b="1">
-                <a:solidFill>
-                  <a:srgbClr val="5D626C"/>
-                </a:solidFill>
-                <a:latin typeface="微软雅黑" panose="020B0503020204020204" charset="-122"/>
-                <a:ea typeface="微软雅黑" panose="020B0503020204020204" charset="-122"/>
-                <a:cs typeface="微软雅黑" panose="020B0503020204020204" charset="-122"/>
-              </a:defRPr>
-            </a:pPr>
-            <a:r>
-              <a:rPr sz="1050" b="1">
-                <a:solidFill>
-                  <a:srgbClr val="5D626C"/>
-                </a:solidFill>
-                <a:latin typeface="微软雅黑" panose="020B0503020204020204" charset="-122"/>
-                <a:ea typeface="微软雅黑" panose="020B0503020204020204" charset="-122"/>
-                <a:cs typeface="微软雅黑" panose="020B0503020204020204" charset="-122"/>
-              </a:rPr>
-              <a:t>13 · 总结</a:t>
-            </a:r>
-            <a:endParaRPr sz="1050" b="1">
-              <a:solidFill>
-                <a:srgbClr val="5D626C"/>
-              </a:solidFill>
-              <a:latin typeface="微软雅黑" panose="020B0503020204020204" charset="-122"/>
-              <a:ea typeface="微软雅黑" panose="020B0503020204020204" charset="-122"/>
-              <a:cs typeface="微软雅黑" panose="020B0503020204020204" charset="-122"/>
-            </a:endParaRPr>
-          </a:p>
-        </p:txBody>
-      </p:sp>
-      <p:sp>
-        <p:nvSpPr>
-          <p:cNvPr id="3" name="end_title"/>
-          <p:cNvSpPr>
-            <a:spLocks noGrp="1"/>
-          </p:cNvSpPr>
-          <p:nvPr/>
-        </p:nvSpPr>
-        <p:spPr>
-          <a:xfrm>
-            <a:off x="400050" y="1000125"/>
-            <a:ext cx="8096250" cy="619125"/>
-          </a:xfrm>
-          <a:prstGeom prst="rect">
-            <a:avLst/>
-          </a:prstGeom>
-          <a:noFill/>
-          <a:ln w="0">
-            <a:noFill/>
-            <a:prstDash val="solid"/>
-          </a:ln>
-        </p:spPr>
-        <p:txBody>
-          <a:bodyPr lIns="0" tIns="0" rIns="0" bIns="0" anchor="t"/>
-          <a:lstStyle/>
-          <a:p>
-            <a:pPr algn="l">
-              <a:defRPr sz="3300" b="1">
-                <a:solidFill>
-                  <a:srgbClr val="17181C"/>
-                </a:solidFill>
-                <a:latin typeface="微软雅黑" panose="020B0503020204020204" charset="-122"/>
-                <a:ea typeface="微软雅黑" panose="020B0503020204020204" charset="-122"/>
-                <a:cs typeface="微软雅黑" panose="020B0503020204020204" charset="-122"/>
-              </a:defRPr>
-            </a:pPr>
-            <a:r>
-              <a:rPr sz="3300" b="1">
-                <a:solidFill>
-                  <a:srgbClr val="17181C"/>
-                </a:solidFill>
-                <a:latin typeface="微软雅黑" panose="020B0503020204020204" charset="-122"/>
-                <a:ea typeface="微软雅黑" panose="020B0503020204020204" charset="-122"/>
-                <a:cs typeface="微软雅黑" panose="020B0503020204020204" charset="-122"/>
-              </a:rPr>
-              <a:t>最后把整套设计压回一句话</a:t>
-            </a:r>
-            <a:endParaRPr sz="3300" b="1">
-              <a:solidFill>
-                <a:srgbClr val="17181C"/>
-              </a:solidFill>
-              <a:latin typeface="微软雅黑" panose="020B0503020204020204" charset="-122"/>
-              <a:ea typeface="微软雅黑" panose="020B0503020204020204" charset="-122"/>
-              <a:cs typeface="微软雅黑" panose="020B0503020204020204" charset="-122"/>
-            </a:endParaRPr>
-          </a:p>
-        </p:txBody>
-      </p:sp>
-      <p:sp>
-        <p:nvSpPr>
-          <p:cNvPr id="4" name="question_40_42"/>
-          <p:cNvSpPr>
-            <a:spLocks noGrp="1"/>
-          </p:cNvSpPr>
-          <p:nvPr/>
-        </p:nvSpPr>
-        <p:spPr>
-          <a:xfrm>
-            <a:off x="400050" y="1952625"/>
-            <a:ext cx="7143750" cy="533400"/>
-          </a:xfrm>
-          <a:prstGeom prst="rect">
-            <a:avLst/>
-          </a:prstGeom>
-          <a:noFill/>
-          <a:ln w="0">
-            <a:noFill/>
-            <a:prstDash val="solid"/>
-          </a:ln>
-        </p:spPr>
-        <p:txBody>
-          <a:bodyPr lIns="0" tIns="0" rIns="0" bIns="0" anchor="t"/>
-          <a:lstStyle/>
-          <a:p>
-            <a:pPr algn="l">
-              <a:defRPr sz="1800" b="1">
-                <a:solidFill>
-                  <a:srgbClr val="DE3840"/>
-                </a:solidFill>
-                <a:latin typeface="微软雅黑" panose="020B0503020204020204" charset="-122"/>
-                <a:ea typeface="微软雅黑" panose="020B0503020204020204" charset="-122"/>
-                <a:cs typeface="微软雅黑" panose="020B0503020204020204" charset="-122"/>
-              </a:defRPr>
-            </a:pPr>
-            <a:r>
-              <a:rPr sz="1800" b="1">
-                <a:solidFill>
-                  <a:srgbClr val="DE3840"/>
-                </a:solidFill>
-                <a:latin typeface="微软雅黑" panose="020B0503020204020204" charset="-122"/>
-                <a:ea typeface="微软雅黑" panose="020B0503020204020204" charset="-122"/>
-                <a:cs typeface="微软雅黑" panose="020B0503020204020204" charset="-122"/>
-              </a:rPr>
-              <a:t>红黑树的代码为什么看起来分支很多？</a:t>
-            </a:r>
-            <a:endParaRPr sz="1800" b="1">
-              <a:solidFill>
-                <a:srgbClr val="DE3840"/>
-              </a:solidFill>
-              <a:latin typeface="微软雅黑" panose="020B0503020204020204" charset="-122"/>
-              <a:ea typeface="微软雅黑" panose="020B0503020204020204" charset="-122"/>
-              <a:cs typeface="微软雅黑" panose="020B0503020204020204" charset="-122"/>
-            </a:endParaRPr>
-          </a:p>
-        </p:txBody>
-      </p:sp>
-      <p:sp>
-        <p:nvSpPr>
-          <p:cNvPr id="5" name="reason_bar_40_42"/>
-          <p:cNvSpPr>
-            <a:spLocks noGrp="1"/>
-          </p:cNvSpPr>
-          <p:nvPr/>
-        </p:nvSpPr>
-        <p:spPr>
-          <a:xfrm>
-            <a:off x="400050" y="2562225"/>
-            <a:ext cx="66675" cy="3105150"/>
-          </a:xfrm>
-          <a:prstGeom prst="rect">
-            <a:avLst/>
-          </a:prstGeom>
-          <a:solidFill>
-            <a:srgbClr val="DE3840"/>
-          </a:solidFill>
-          <a:ln w="0">
-            <a:noFill/>
-            <a:prstDash val="solid"/>
-          </a:ln>
-        </p:spPr>
-      </p:sp>
-      <p:sp>
-        <p:nvSpPr>
-          <p:cNvPr id="6" name="reason_body_40_42"/>
-          <p:cNvSpPr>
-            <a:spLocks noGrp="1"/>
-          </p:cNvSpPr>
-          <p:nvPr/>
-        </p:nvSpPr>
-        <p:spPr>
-          <a:xfrm>
-            <a:off x="628650" y="2676525"/>
-            <a:ext cx="6858000" cy="2952750"/>
-          </a:xfrm>
-          <a:prstGeom prst="rect">
-            <a:avLst/>
-          </a:prstGeom>
-          <a:noFill/>
-          <a:ln w="0">
-            <a:noFill/>
-            <a:prstDash val="solid"/>
-          </a:ln>
-        </p:spPr>
-        <p:txBody>
-          <a:bodyPr lIns="0" tIns="0" rIns="0" bIns="0" anchor="t"/>
-          <a:lstStyle/>
-          <a:p>
-            <a:pPr algn="l">
-              <a:defRPr sz="1425" b="0">
-                <a:solidFill>
-                  <a:srgbClr val="5D626C"/>
-                </a:solidFill>
-                <a:latin typeface="微软雅黑" panose="020B0503020204020204" charset="-122"/>
-                <a:ea typeface="微软雅黑" panose="020B0503020204020204" charset="-122"/>
-                <a:cs typeface="微软雅黑" panose="020B0503020204020204" charset="-122"/>
-              </a:defRPr>
-            </a:pPr>
-            <a:r>
-              <a:rPr sz="1425" b="0">
-                <a:solidFill>
-                  <a:srgbClr val="5D626C"/>
-                </a:solidFill>
-                <a:latin typeface="微软雅黑" panose="020B0503020204020204" charset="-122"/>
-                <a:ea typeface="微软雅黑" panose="020B0503020204020204" charset="-122"/>
-                <a:cs typeface="微软雅黑" panose="020B0503020204020204" charset="-122"/>
-              </a:rPr>
-              <a:t>因为它在守护的不是某个固定树形，而是三类长期不变量：二叉搜索顺序、红节点约束、所有路径黑高相等。</a:t>
-            </a:r>
-            <a:endParaRPr sz="1425" b="0">
-              <a:solidFill>
-                <a:srgbClr val="5D626C"/>
-              </a:solidFill>
-              <a:latin typeface="微软雅黑" panose="020B0503020204020204" charset="-122"/>
-              <a:ea typeface="微软雅黑" panose="020B0503020204020204" charset="-122"/>
-              <a:cs typeface="微软雅黑" panose="020B0503020204020204" charset="-122"/>
-            </a:endParaRPr>
-          </a:p>
-          <a:p>
-            <a:endParaRPr sz="1425"/>
-          </a:p>
-          <a:p>
-            <a:pPr algn="l">
-              <a:defRPr sz="1425" b="0">
-                <a:solidFill>
-                  <a:srgbClr val="5D626C"/>
-                </a:solidFill>
-                <a:latin typeface="微软雅黑" panose="020B0503020204020204" charset="-122"/>
-                <a:ea typeface="微软雅黑" panose="020B0503020204020204" charset="-122"/>
-                <a:cs typeface="微软雅黑" panose="020B0503020204020204" charset="-122"/>
-              </a:defRPr>
-            </a:pPr>
-            <a:r>
-              <a:rPr sz="1425" b="0">
-                <a:solidFill>
-                  <a:srgbClr val="5D626C"/>
-                </a:solidFill>
-                <a:latin typeface="微软雅黑" panose="020B0503020204020204" charset="-122"/>
-                <a:ea typeface="微软雅黑" panose="020B0503020204020204" charset="-122"/>
-                <a:cs typeface="微软雅黑" panose="020B0503020204020204" charset="-122"/>
-              </a:rPr>
-              <a:t>insert 选择先制造局部红红冲突；remove 选择先把复杂节点转成至多一个孩子，再把黑高亏损做成 DOUBLE_BLACK；旋转只修改最小局部，但必须把内部、外部和反向 parent 全部接回。</a:t>
-            </a:r>
-            <a:endParaRPr sz="1425" b="0">
-              <a:solidFill>
-                <a:srgbClr val="5D626C"/>
-              </a:solidFill>
-              <a:latin typeface="微软雅黑" panose="020B0503020204020204" charset="-122"/>
-              <a:ea typeface="微软雅黑" panose="020B0503020204020204" charset="-122"/>
-              <a:cs typeface="微软雅黑" panose="020B0503020204020204" charset="-122"/>
-            </a:endParaRPr>
-          </a:p>
-          <a:p>
-            <a:endParaRPr sz="1425"/>
-          </a:p>
-          <a:p>
-            <a:pPr algn="l">
-              <a:defRPr sz="1425" b="0">
-                <a:solidFill>
-                  <a:srgbClr val="5D626C"/>
-                </a:solidFill>
-                <a:latin typeface="微软雅黑" panose="020B0503020204020204" charset="-122"/>
-                <a:ea typeface="微软雅黑" panose="020B0503020204020204" charset="-122"/>
-                <a:cs typeface="微软雅黑" panose="020B0503020204020204" charset="-122"/>
-              </a:defRPr>
-            </a:pPr>
-            <a:r>
-              <a:rPr sz="1425" b="0">
-                <a:solidFill>
-                  <a:srgbClr val="5D626C"/>
-                </a:solidFill>
-                <a:latin typeface="微软雅黑" panose="020B0503020204020204" charset="-122"/>
-                <a:ea typeface="微软雅黑" panose="020B0503020204020204" charset="-122"/>
-                <a:cs typeface="微软雅黑" panose="020B0503020204020204" charset="-122"/>
-              </a:rPr>
-              <a:t>EasyX 只负责显示最终结果。真正需要答辩的是后端为什么这样判断、怎样改变局部结构，以及测试怎样证明修复后的树仍然合法。</a:t>
-            </a:r>
-            <a:endParaRPr sz="1425" b="0">
-              <a:solidFill>
-                <a:srgbClr val="5D626C"/>
-              </a:solidFill>
-              <a:latin typeface="微软雅黑" panose="020B0503020204020204" charset="-122"/>
-              <a:ea typeface="微软雅黑" panose="020B0503020204020204" charset="-122"/>
-              <a:cs typeface="微软雅黑" panose="020B0503020204020204" charset="-122"/>
-            </a:endParaRPr>
-          </a:p>
-        </p:txBody>
-      </p:sp>
-      <p:sp>
-        <p:nvSpPr>
-          <p:cNvPr id="7" name="end_qa"/>
-          <p:cNvSpPr>
-            <a:spLocks noGrp="1"/>
-          </p:cNvSpPr>
-          <p:nvPr/>
-        </p:nvSpPr>
-        <p:spPr>
-          <a:xfrm>
-            <a:off x="8429625" y="2857500"/>
-            <a:ext cx="2667000" cy="666750"/>
-          </a:xfrm>
-          <a:prstGeom prst="rect">
-            <a:avLst/>
-          </a:prstGeom>
-          <a:noFill/>
-          <a:ln w="0">
-            <a:noFill/>
-            <a:prstDash val="solid"/>
-          </a:ln>
-        </p:spPr>
-        <p:txBody>
-          <a:bodyPr lIns="0" tIns="0" rIns="0" bIns="0" anchor="t"/>
-          <a:lstStyle/>
-          <a:p>
-            <a:pPr algn="ctr">
-              <a:defRPr sz="3150" b="1">
-                <a:solidFill>
-                  <a:srgbClr val="17181C"/>
-                </a:solidFill>
-                <a:latin typeface="微软雅黑" panose="020B0503020204020204" charset="-122"/>
-                <a:ea typeface="微软雅黑" panose="020B0503020204020204" charset="-122"/>
-                <a:cs typeface="微软雅黑" panose="020B0503020204020204" charset="-122"/>
-              </a:defRPr>
-            </a:pPr>
-            <a:r>
-              <a:rPr sz="3150" b="1">
-                <a:solidFill>
-                  <a:srgbClr val="17181C"/>
-                </a:solidFill>
-                <a:latin typeface="微软雅黑" panose="020B0503020204020204" charset="-122"/>
-                <a:ea typeface="微软雅黑" panose="020B0503020204020204" charset="-122"/>
-                <a:cs typeface="微软雅黑" panose="020B0503020204020204" charset="-122"/>
-              </a:rPr>
-              <a:t>Q &amp; A</a:t>
-            </a:r>
-            <a:endParaRPr sz="3150" b="1">
-              <a:solidFill>
-                <a:srgbClr val="17181C"/>
-              </a:solidFill>
-              <a:latin typeface="微软雅黑" panose="020B0503020204020204" charset="-122"/>
-              <a:ea typeface="微软雅黑" panose="020B0503020204020204" charset="-122"/>
-              <a:cs typeface="微软雅黑" panose="020B0503020204020204" charset="-122"/>
-            </a:endParaRPr>
-          </a:p>
-        </p:txBody>
-      </p:sp>
-      <p:sp>
-        <p:nvSpPr>
-          <p:cNvPr id="8" name="end_hint"/>
-          <p:cNvSpPr>
-            <a:spLocks noGrp="1"/>
-          </p:cNvSpPr>
-          <p:nvPr/>
-        </p:nvSpPr>
-        <p:spPr>
-          <a:xfrm>
-            <a:off x="7858125" y="3905250"/>
-            <a:ext cx="3810000" cy="952500"/>
-          </a:xfrm>
-          <a:prstGeom prst="rect">
-            <a:avLst/>
-          </a:prstGeom>
-          <a:noFill/>
-          <a:ln w="0">
-            <a:noFill/>
-            <a:prstDash val="solid"/>
-          </a:ln>
-        </p:spPr>
-        <p:txBody>
-          <a:bodyPr lIns="0" tIns="0" rIns="0" bIns="0" anchor="t"/>
-          <a:lstStyle/>
-          <a:p>
-            <a:pPr algn="ctr">
-              <a:defRPr sz="1350" b="0">
-                <a:solidFill>
-                  <a:srgbClr val="5D626C"/>
-                </a:solidFill>
-                <a:latin typeface="微软雅黑" panose="020B0503020204020204" charset="-122"/>
-                <a:ea typeface="微软雅黑" panose="020B0503020204020204" charset="-122"/>
-                <a:cs typeface="微软雅黑" panose="020B0503020204020204" charset="-122"/>
-              </a:defRPr>
-            </a:pPr>
-            <a:r>
-              <a:rPr sz="1350" b="0">
-                <a:solidFill>
-                  <a:srgbClr val="5D626C"/>
-                </a:solidFill>
-                <a:latin typeface="微软雅黑" panose="020B0503020204020204" charset="-122"/>
-                <a:ea typeface="微软雅黑" panose="020B0503020204020204" charset="-122"/>
-                <a:cs typeface="微软雅黑" panose="020B0503020204020204" charset="-122"/>
-              </a:rPr>
-              <a:t>答辩时如果被追问删除，先画 P / S / N / F / DB，</a:t>
-            </a:r>
-            <a:endParaRPr sz="1350" b="0">
-              <a:solidFill>
-                <a:srgbClr val="5D626C"/>
-              </a:solidFill>
-              <a:latin typeface="微软雅黑" panose="020B0503020204020204" charset="-122"/>
-              <a:ea typeface="微软雅黑" panose="020B0503020204020204" charset="-122"/>
-              <a:cs typeface="微软雅黑" panose="020B0503020204020204" charset="-122"/>
-            </a:endParaRPr>
-          </a:p>
-          <a:p>
-            <a:pPr algn="ctr">
-              <a:defRPr sz="1350" b="0">
-                <a:solidFill>
-                  <a:srgbClr val="5D626C"/>
-                </a:solidFill>
-                <a:latin typeface="微软雅黑" panose="020B0503020204020204" charset="-122"/>
-                <a:ea typeface="微软雅黑" panose="020B0503020204020204" charset="-122"/>
-                <a:cs typeface="微软雅黑" panose="020B0503020204020204" charset="-122"/>
-              </a:defRPr>
-            </a:pPr>
-            <a:r>
-              <a:rPr sz="1350" b="0">
-                <a:solidFill>
-                  <a:srgbClr val="5D626C"/>
-                </a:solidFill>
-                <a:latin typeface="微软雅黑" panose="020B0503020204020204" charset="-122"/>
-                <a:ea typeface="微软雅黑" panose="020B0503020204020204" charset="-122"/>
-                <a:cs typeface="微软雅黑" panose="020B0503020204020204" charset="-122"/>
-              </a:rPr>
-              <a:t>再说当前分支是在“消掉亏损”还是“把亏损向上推”。</a:t>
-            </a:r>
-            <a:endParaRPr sz="1350" b="0">
-              <a:solidFill>
-                <a:srgbClr val="5D626C"/>
-              </a:solidFill>
-              <a:latin typeface="微软雅黑" panose="020B0503020204020204" charset="-122"/>
-              <a:ea typeface="微软雅黑" panose="020B0503020204020204" charset="-122"/>
-              <a:cs typeface="微软雅黑" panose="020B0503020204020204" charset="-122"/>
-            </a:endParaRPr>
-          </a:p>
-        </p:txBody>
-      </p:sp>
-      <p:sp>
-        <p:nvSpPr>
-          <p:cNvPr id="9" name="end_footer"/>
-          <p:cNvSpPr>
-            <a:spLocks noGrp="1"/>
-          </p:cNvSpPr>
-          <p:nvPr/>
-        </p:nvSpPr>
-        <p:spPr>
-          <a:xfrm>
-            <a:off x="11258550" y="6438900"/>
-            <a:ext cx="523875" cy="190500"/>
-          </a:xfrm>
-          <a:prstGeom prst="rect">
-            <a:avLst/>
-          </a:prstGeom>
-          <a:noFill/>
-          <a:ln w="0">
-            <a:noFill/>
-            <a:prstDash val="solid"/>
-          </a:ln>
-        </p:spPr>
-        <p:txBody>
-          <a:bodyPr lIns="0" tIns="0" rIns="0" bIns="0" anchor="t"/>
-          <a:lstStyle/>
-          <a:p>
-            <a:pPr algn="r">
-              <a:defRPr sz="900" b="0">
-                <a:solidFill>
-                  <a:srgbClr val="5D626C"/>
-                </a:solidFill>
-                <a:latin typeface="微软雅黑" panose="020B0503020204020204" charset="-122"/>
-                <a:ea typeface="微软雅黑" panose="020B0503020204020204" charset="-122"/>
-                <a:cs typeface="微软雅黑" panose="020B0503020204020204" charset="-122"/>
-              </a:defRPr>
-            </a:pPr>
-            <a:r>
-              <a:rPr sz="900" b="0">
-                <a:solidFill>
-                  <a:srgbClr val="5D626C"/>
-                </a:solidFill>
-                <a:latin typeface="微软雅黑" panose="020B0503020204020204" charset="-122"/>
-                <a:ea typeface="微软雅黑" panose="020B0503020204020204" charset="-122"/>
-                <a:cs typeface="微软雅黑" panose="020B0503020204020204" charset="-122"/>
-              </a:rPr>
-              <a:t>40</a:t>
-            </a:r>
-            <a:endParaRPr sz="900" b="0">
               <a:solidFill>
                 <a:srgbClr val="5D626C"/>
               </a:solidFill>
